--- a/docs/HMI_Copilot_5min.pptx
+++ b/docs/HMI_Copilot_5min.pptx
@@ -16,6 +16,7 @@
     <p:sldId id="264" r:id="rId16"/>
     <p:sldId id="265" r:id="rId17"/>
     <p:sldId id="266" r:id="rId18"/>
+    <p:sldId id="267" r:id="rId19"/>
   </p:sldIdLst>
   <p:sldSz cx="12191695" cy="6858000" type="screen4x3"/>
   <p:notesSz cx="6858000" cy="9144000"/>
@@ -512,7 +513,7 @@
           <a:lstStyle/>
           <a:p>
             <a:r>
-              <a:t>0:00–0:25 · HOOK. Read the sentence. Then the numbers. Then the last line, slowly. Do not explain yet.</a:t>
+              <a:t>0:00–0:20 · HOOK. Read the sentence, then the numbers, then the last line slowly. Two seconds of silence. Do not explain yet.</a:t>
             </a:r>
           </a:p>
         </p:txBody>
@@ -582,7 +583,7 @@
           <a:lstStyle/>
           <a:p>
             <a:r>
-              <a:t>4:05–4:40 · Integrators already have the licensed OTE install the tool needs. Customer and technical precondition are the same people.</a:t>
+              <a:t>3:46–4:10 · If a judge takes one thing away, it is this slide. Offer to open the file on their machine.</a:t>
             </a:r>
           </a:p>
         </p:txBody>
@@ -652,7 +653,77 @@
           <a:lstStyle/>
           <a:p>
             <a:r>
-              <a:t>4:40–5:00 · Close on the invitation. Stop talking.</a:t>
+              <a:t>4:10–4:45 · Integrators already have the licensed OTE install the tool needs. Customer and technical precondition are the same people.</a:t>
+            </a:r>
+          </a:p>
+        </p:txBody>
+      </p:sp>
+      <p:sp>
+        <p:nvSpPr>
+          <p:cNvPr id="4" name="Slide Number Placeholder 3"/>
+          <p:cNvSpPr>
+            <a:spLocks noGrp="1"/>
+          </p:cNvSpPr>
+          <p:nvPr>
+            <p:ph type="sldNum" idx="5" sz="quarter"/>
+          </p:nvPr>
+        </p:nvSpPr>
+        <p:spPr/>
+      </p:sp>
+    </p:spTree>
+  </p:cSld>
+  <p:clrMapOvr>
+    <a:masterClrMapping/>
+  </p:clrMapOvr>
+</p:notes>
+</file>
+
+<file path=ppt/notesSlides/notesSlide12.xml><?xml version="1.0" encoding="utf-8"?>
+<p:notes xmlns:a="http://schemas.openxmlformats.org/drawingml/2006/main" xmlns:p="http://schemas.openxmlformats.org/presentationml/2006/main" xmlns:r="http://schemas.openxmlformats.org/officeDocument/2006/relationships">
+  <p:cSld>
+    <p:spTree>
+      <p:nvGrpSpPr>
+        <p:cNvPr id="1" name=""/>
+        <p:cNvGrpSpPr/>
+        <p:nvPr/>
+      </p:nvGrpSpPr>
+      <p:grpSpPr>
+        <a:xfrm>
+          <a:off x="0" y="0"/>
+          <a:ext cx="0" cy="0"/>
+          <a:chOff x="0" y="0"/>
+          <a:chExt cx="0" cy="0"/>
+        </a:xfrm>
+      </p:grpSpPr>
+      <p:sp>
+        <p:nvSpPr>
+          <p:cNvPr id="2" name="Slide Image Placeholder 1"/>
+          <p:cNvSpPr>
+            <a:spLocks noGrp="1"/>
+          </p:cNvSpPr>
+          <p:nvPr>
+            <p:ph type="sldImg" idx="2"/>
+          </p:nvPr>
+        </p:nvSpPr>
+        <p:spPr/>
+      </p:sp>
+      <p:sp>
+        <p:nvSpPr>
+          <p:cNvPr id="3" name="Notes Placeholder 2"/>
+          <p:cNvSpPr>
+            <a:spLocks noGrp="1"/>
+          </p:cNvSpPr>
+          <p:nvPr>
+            <p:ph type="body" idx="3" sz="quarter"/>
+          </p:nvPr>
+        </p:nvSpPr>
+        <p:spPr/>
+        <p:txBody>
+          <a:bodyPr/>
+          <a:lstStyle/>
+          <a:p>
+            <a:r>
+              <a:t>4:45–5:00 · Close on the invitation. Stop talking.</a:t>
             </a:r>
           </a:p>
         </p:txBody>
@@ -722,7 +793,7 @@
           <a:lstStyle/>
           <a:p>
             <a:r>
-              <a:t>0:25–0:55 · Four costs, fast. Do not read the table. Land the black bar — this is a safety story, not only a productivity one.</a:t>
+              <a:t>0:20–0:50 · Do not read the table. Land the black bar: this is a safety problem, not only a productivity one.</a:t>
             </a:r>
           </a:p>
         </p:txBody>
@@ -792,7 +863,7 @@
           <a:lstStyle/>
           <a:p>
             <a:r>
-              <a:t>0:55–1:20 · The enabling insight. Say: we asked the one question that kills this category of idea, and we asked it first.</a:t>
+              <a:t>0:50–1:15 · The product in one diagram. Stress the last line — the human is in the loop by design, not by limitation.</a:t>
             </a:r>
           </a:p>
         </p:txBody>
@@ -862,7 +933,7 @@
           <a:lstStyle/>
           <a:p>
             <a:r>
-              <a:t>1:20–1:50 · Switch to the app if it is up. Type the sentence live. Otherwise this slide is the fallback.</a:t>
+              <a:t>1:15–1:40 · The enabling insight. Say: we asked the one question that kills this category of idea, and we asked it first.</a:t>
             </a:r>
           </a:p>
         </p:txBody>
@@ -932,7 +1003,7 @@
           <a:lstStyle/>
           <a:p>
             <a:r>
-              <a:t>1:50–2:15 · Point at the step details. This is the difference between a black box and a tool.</a:t>
+              <a:t>1:40–2:15 · The longest non-demo slide. Trace the flow left to right once, then land the green line — that is the credibility claim.</a:t>
             </a:r>
           </a:p>
         </p:txBody>
@@ -1002,7 +1073,7 @@
           <a:lstStyle/>
           <a:p>
             <a:r>
-              <a:t>2:15–2:40 · The highest-value view. Say: this is the stated problem, and this is it solved.</a:t>
+              <a:t>2:15–2:40 · Switch to the live app here if it is up. Otherwise this slide is the fallback.</a:t>
             </a:r>
           </a:p>
         </p:txBody>
@@ -1072,7 +1143,7 @@
           <a:lstStyle/>
           <a:p>
             <a:r>
-              <a:t>2:40–3:05 · Let it run for a few seconds in silence. The alarms firing is the moment.</a:t>
+              <a:t>2:40–3:02 · Point at the step details. This is the difference between a black box and a tool.</a:t>
             </a:r>
           </a:p>
         </p:txBody>
@@ -1142,7 +1213,7 @@
           <a:lstStyle/>
           <a:p>
             <a:r>
-              <a:t>3:05–3:35 · The credibility slide. Most tools in this space render a pretty approximation and generate the file separately. Ours cannot.</a:t>
+              <a:t>3:02–3:24 · The highest-value view. Say: this is the stated problem, and this is it solved.</a:t>
             </a:r>
           </a:p>
         </p:txBody>
@@ -1212,7 +1283,7 @@
           <a:lstStyle/>
           <a:p>
             <a:r>
-              <a:t>3:35–4:05 · If a judge takes one thing away, it is this slide. Offer to open the file on their machine.</a:t>
+              <a:t>3:24–3:46 · Let it run in silence for a few seconds. The alarms firing is the moment.</a:t>
             </a:r>
           </a:p>
         </p:txBody>
@@ -5368,7 +5439,1518 @@
                 </a:solidFill>
                 <a:latin typeface="Arial"/>
               </a:rPr>
-              <a:t>THE BUSINESS</a:t>
+              <a:t>06 · PROOF</a:t>
+            </a:r>
+          </a:p>
+        </p:txBody>
+      </p:sp>
+      <p:sp>
+        <p:nvSpPr>
+          <p:cNvPr id="4" name="TextBox 3"/>
+          <p:cNvSpPr txBox="1"/>
+          <p:nvPr/>
+        </p:nvSpPr>
+        <p:spPr>
+          <a:xfrm>
+            <a:off x="685800" y="713232"/>
+            <a:ext cx="10789920" cy="685800"/>
+          </a:xfrm>
+          <a:prstGeom prst="rect">
+            <a:avLst/>
+          </a:prstGeom>
+          <a:noFill/>
+        </p:spPr>
+        <p:txBody>
+          <a:bodyPr wrap="square" anchor="t" lIns="0" rIns="0" tIns="0" bIns="0">
+            <a:spAutoFit/>
+          </a:bodyPr>
+          <a:lstStyle/>
+          <a:p>
+            <a:pPr algn="l">
+              <a:lnSpc>
+                <a:spcPct val="105000"/>
+              </a:lnSpc>
+              <a:spcBef>
+                <a:spcPts val="0"/>
+              </a:spcBef>
+              <a:spcAft>
+                <a:spcPts val="600"/>
+              </a:spcAft>
+            </a:pPr>
+            <a:r>
+              <a:rPr sz="3000" b="1">
+                <a:solidFill>
+                  <a:srgbClr val="1A1F26"/>
+                </a:solidFill>
+                <a:latin typeface="Arial"/>
+              </a:rPr>
+              <a:t>Built, not proposed</a:t>
+            </a:r>
+          </a:p>
+        </p:txBody>
+      </p:sp>
+      <p:sp>
+        <p:nvSpPr>
+          <p:cNvPr id="5" name="Rectangle 4"/>
+          <p:cNvSpPr/>
+          <p:nvPr/>
+        </p:nvSpPr>
+        <p:spPr>
+          <a:xfrm>
+            <a:off x="685800" y="1481328"/>
+            <a:ext cx="822960" cy="41148"/>
+          </a:xfrm>
+          <a:prstGeom prst="rect">
+            <a:avLst/>
+          </a:prstGeom>
+          <a:solidFill>
+            <a:srgbClr val="3DCD58"/>
+          </a:solidFill>
+          <a:ln>
+            <a:noFill/>
+          </a:ln>
+          <a:effectLst/>
+        </p:spPr>
+        <p:style>
+          <a:lnRef idx="1">
+            <a:schemeClr val="accent1"/>
+          </a:lnRef>
+          <a:fillRef idx="3">
+            <a:schemeClr val="accent1"/>
+          </a:fillRef>
+          <a:effectRef idx="2">
+            <a:schemeClr val="accent1"/>
+          </a:effectRef>
+          <a:fontRef idx="minor">
+            <a:schemeClr val="lt1"/>
+          </a:fontRef>
+        </p:style>
+        <p:txBody>
+          <a:bodyPr rtlCol="0" anchor="ctr"/>
+          <a:lstStyle/>
+          <a:p>
+            <a:pPr algn="ctr"/>
+          </a:p>
+        </p:txBody>
+      </p:sp>
+      <p:sp>
+        <p:nvSpPr>
+          <p:cNvPr id="6" name="TextBox 5"/>
+          <p:cNvSpPr txBox="1"/>
+          <p:nvPr/>
+        </p:nvSpPr>
+        <p:spPr>
+          <a:xfrm>
+            <a:off x="685800" y="1783080"/>
+            <a:ext cx="10789920" cy="640080"/>
+          </a:xfrm>
+          <a:prstGeom prst="rect">
+            <a:avLst/>
+          </a:prstGeom>
+          <a:noFill/>
+        </p:spPr>
+        <p:txBody>
+          <a:bodyPr wrap="square" anchor="t" lIns="0" rIns="0" tIns="0" bIns="0">
+            <a:spAutoFit/>
+          </a:bodyPr>
+          <a:lstStyle/>
+          <a:p>
+            <a:pPr algn="l">
+              <a:lnSpc>
+                <a:spcPct val="135000"/>
+              </a:lnSpc>
+              <a:spcBef>
+                <a:spcPts val="0"/>
+              </a:spcBef>
+              <a:spcAft>
+                <a:spcPts val="600"/>
+              </a:spcAft>
+            </a:pPr>
+            <a:r>
+              <a:rPr sz="1650" b="0">
+                <a:solidFill>
+                  <a:srgbClr val="1A1F26"/>
+                </a:solidFill>
+                <a:latin typeface="Arial"/>
+              </a:rPr>
+              <a:t>Two .eote files written from scratch, both open in EcoStruxure Operator Terminal Expert 4.4. Neither was ever saved by the product.</a:t>
+            </a:r>
+          </a:p>
+        </p:txBody>
+      </p:sp>
+      <p:sp>
+        <p:nvSpPr>
+          <p:cNvPr id="7" name="Rectangle 6"/>
+          <p:cNvSpPr/>
+          <p:nvPr/>
+        </p:nvSpPr>
+        <p:spPr>
+          <a:xfrm>
+            <a:off x="685800" y="2651760"/>
+            <a:ext cx="1997049" cy="1417320"/>
+          </a:xfrm>
+          <a:prstGeom prst="rect">
+            <a:avLst/>
+          </a:prstGeom>
+          <a:solidFill>
+            <a:srgbClr val="F4F6F8"/>
+          </a:solidFill>
+          <a:ln w="12700">
+            <a:solidFill>
+              <a:srgbClr val="D8DEE5"/>
+            </a:solidFill>
+          </a:ln>
+          <a:effectLst/>
+        </p:spPr>
+        <p:style>
+          <a:lnRef idx="1">
+            <a:schemeClr val="accent1"/>
+          </a:lnRef>
+          <a:fillRef idx="3">
+            <a:schemeClr val="accent1"/>
+          </a:fillRef>
+          <a:effectRef idx="2">
+            <a:schemeClr val="accent1"/>
+          </a:effectRef>
+          <a:fontRef idx="minor">
+            <a:schemeClr val="lt1"/>
+          </a:fontRef>
+        </p:style>
+        <p:txBody>
+          <a:bodyPr rtlCol="0" anchor="ctr"/>
+          <a:lstStyle/>
+          <a:p>
+            <a:pPr algn="ctr"/>
+          </a:p>
+        </p:txBody>
+      </p:sp>
+      <p:sp>
+        <p:nvSpPr>
+          <p:cNvPr id="8" name="TextBox 7"/>
+          <p:cNvSpPr txBox="1"/>
+          <p:nvPr/>
+        </p:nvSpPr>
+        <p:spPr>
+          <a:xfrm>
+            <a:off x="685800" y="2852928"/>
+            <a:ext cx="1997049" cy="640080"/>
+          </a:xfrm>
+          <a:prstGeom prst="rect">
+            <a:avLst/>
+          </a:prstGeom>
+          <a:noFill/>
+        </p:spPr>
+        <p:txBody>
+          <a:bodyPr wrap="square" anchor="t" lIns="0" rIns="0" tIns="0" bIns="0">
+            <a:spAutoFit/>
+          </a:bodyPr>
+          <a:lstStyle/>
+          <a:p>
+            <a:pPr algn="ctr">
+              <a:lnSpc>
+                <a:spcPct val="125000"/>
+              </a:lnSpc>
+              <a:spcBef>
+                <a:spcPts val="0"/>
+              </a:spcBef>
+              <a:spcAft>
+                <a:spcPts val="600"/>
+              </a:spcAft>
+            </a:pPr>
+            <a:r>
+              <a:rPr sz="3400" b="1">
+                <a:solidFill>
+                  <a:srgbClr val="3DCD58"/>
+                </a:solidFill>
+                <a:latin typeface="Arial"/>
+              </a:rPr>
+              <a:t>19</a:t>
+            </a:r>
+          </a:p>
+        </p:txBody>
+      </p:sp>
+      <p:sp>
+        <p:nvSpPr>
+          <p:cNvPr id="9" name="TextBox 8"/>
+          <p:cNvSpPr txBox="1"/>
+          <p:nvPr/>
+        </p:nvSpPr>
+        <p:spPr>
+          <a:xfrm>
+            <a:off x="795528" y="3520440"/>
+            <a:ext cx="1777593" cy="457200"/>
+          </a:xfrm>
+          <a:prstGeom prst="rect">
+            <a:avLst/>
+          </a:prstGeom>
+          <a:noFill/>
+        </p:spPr>
+        <p:txBody>
+          <a:bodyPr wrap="square" anchor="t" lIns="0" rIns="0" tIns="0" bIns="0">
+            <a:spAutoFit/>
+          </a:bodyPr>
+          <a:lstStyle/>
+          <a:p>
+            <a:pPr algn="ctr">
+              <a:lnSpc>
+                <a:spcPct val="115000"/>
+              </a:lnSpc>
+              <a:spcBef>
+                <a:spcPts val="0"/>
+              </a:spcBef>
+              <a:spcAft>
+                <a:spcPts val="600"/>
+              </a:spcAft>
+            </a:pPr>
+            <a:r>
+              <a:rPr sz="1150" b="0">
+                <a:solidFill>
+                  <a:srgbClr val="5A6673"/>
+                </a:solidFill>
+                <a:latin typeface="Arial"/>
+              </a:rPr>
+              <a:t>parts placed</a:t>
+            </a:r>
+          </a:p>
+        </p:txBody>
+      </p:sp>
+      <p:sp>
+        <p:nvSpPr>
+          <p:cNvPr id="10" name="Rectangle 9"/>
+          <p:cNvSpPr/>
+          <p:nvPr/>
+        </p:nvSpPr>
+        <p:spPr>
+          <a:xfrm>
+            <a:off x="2884017" y="2651760"/>
+            <a:ext cx="1997049" cy="1417320"/>
+          </a:xfrm>
+          <a:prstGeom prst="rect">
+            <a:avLst/>
+          </a:prstGeom>
+          <a:solidFill>
+            <a:srgbClr val="F4F6F8"/>
+          </a:solidFill>
+          <a:ln w="12700">
+            <a:solidFill>
+              <a:srgbClr val="D8DEE5"/>
+            </a:solidFill>
+          </a:ln>
+          <a:effectLst/>
+        </p:spPr>
+        <p:style>
+          <a:lnRef idx="1">
+            <a:schemeClr val="accent1"/>
+          </a:lnRef>
+          <a:fillRef idx="3">
+            <a:schemeClr val="accent1"/>
+          </a:fillRef>
+          <a:effectRef idx="2">
+            <a:schemeClr val="accent1"/>
+          </a:effectRef>
+          <a:fontRef idx="minor">
+            <a:schemeClr val="lt1"/>
+          </a:fontRef>
+        </p:style>
+        <p:txBody>
+          <a:bodyPr rtlCol="0" anchor="ctr"/>
+          <a:lstStyle/>
+          <a:p>
+            <a:pPr algn="ctr"/>
+          </a:p>
+        </p:txBody>
+      </p:sp>
+      <p:sp>
+        <p:nvSpPr>
+          <p:cNvPr id="11" name="TextBox 10"/>
+          <p:cNvSpPr txBox="1"/>
+          <p:nvPr/>
+        </p:nvSpPr>
+        <p:spPr>
+          <a:xfrm>
+            <a:off x="2884017" y="2852928"/>
+            <a:ext cx="1997049" cy="640080"/>
+          </a:xfrm>
+          <a:prstGeom prst="rect">
+            <a:avLst/>
+          </a:prstGeom>
+          <a:noFill/>
+        </p:spPr>
+        <p:txBody>
+          <a:bodyPr wrap="square" anchor="t" lIns="0" rIns="0" tIns="0" bIns="0">
+            <a:spAutoFit/>
+          </a:bodyPr>
+          <a:lstStyle/>
+          <a:p>
+            <a:pPr algn="ctr">
+              <a:lnSpc>
+                <a:spcPct val="125000"/>
+              </a:lnSpc>
+              <a:spcBef>
+                <a:spcPts val="0"/>
+              </a:spcBef>
+              <a:spcAft>
+                <a:spcPts val="600"/>
+              </a:spcAft>
+            </a:pPr>
+            <a:r>
+              <a:rPr sz="3400" b="1">
+                <a:solidFill>
+                  <a:srgbClr val="3DCD58"/>
+                </a:solidFill>
+                <a:latin typeface="Arial"/>
+              </a:rPr>
+              <a:t>7</a:t>
+            </a:r>
+          </a:p>
+        </p:txBody>
+      </p:sp>
+      <p:sp>
+        <p:nvSpPr>
+          <p:cNvPr id="12" name="TextBox 11"/>
+          <p:cNvSpPr txBox="1"/>
+          <p:nvPr/>
+        </p:nvSpPr>
+        <p:spPr>
+          <a:xfrm>
+            <a:off x="2993745" y="3520440"/>
+            <a:ext cx="1777593" cy="457200"/>
+          </a:xfrm>
+          <a:prstGeom prst="rect">
+            <a:avLst/>
+          </a:prstGeom>
+          <a:noFill/>
+        </p:spPr>
+        <p:txBody>
+          <a:bodyPr wrap="square" anchor="t" lIns="0" rIns="0" tIns="0" bIns="0">
+            <a:spAutoFit/>
+          </a:bodyPr>
+          <a:lstStyle/>
+          <a:p>
+            <a:pPr algn="ctr">
+              <a:lnSpc>
+                <a:spcPct val="115000"/>
+              </a:lnSpc>
+              <a:spcBef>
+                <a:spcPts val="0"/>
+              </a:spcBef>
+              <a:spcAft>
+                <a:spcPts val="600"/>
+              </a:spcAft>
+            </a:pPr>
+            <a:r>
+              <a:rPr sz="1150" b="0">
+                <a:solidFill>
+                  <a:srgbClr val="5A6673"/>
+                </a:solidFill>
+                <a:latin typeface="Arial"/>
+              </a:rPr>
+              <a:t>typed tags</a:t>
+            </a:r>
+          </a:p>
+        </p:txBody>
+      </p:sp>
+      <p:sp>
+        <p:nvSpPr>
+          <p:cNvPr id="13" name="Rectangle 12"/>
+          <p:cNvSpPr/>
+          <p:nvPr/>
+        </p:nvSpPr>
+        <p:spPr>
+          <a:xfrm>
+            <a:off x="5082235" y="2651760"/>
+            <a:ext cx="1997049" cy="1417320"/>
+          </a:xfrm>
+          <a:prstGeom prst="rect">
+            <a:avLst/>
+          </a:prstGeom>
+          <a:solidFill>
+            <a:srgbClr val="F4F6F8"/>
+          </a:solidFill>
+          <a:ln w="12700">
+            <a:solidFill>
+              <a:srgbClr val="D8DEE5"/>
+            </a:solidFill>
+          </a:ln>
+          <a:effectLst/>
+        </p:spPr>
+        <p:style>
+          <a:lnRef idx="1">
+            <a:schemeClr val="accent1"/>
+          </a:lnRef>
+          <a:fillRef idx="3">
+            <a:schemeClr val="accent1"/>
+          </a:fillRef>
+          <a:effectRef idx="2">
+            <a:schemeClr val="accent1"/>
+          </a:effectRef>
+          <a:fontRef idx="minor">
+            <a:schemeClr val="lt1"/>
+          </a:fontRef>
+        </p:style>
+        <p:txBody>
+          <a:bodyPr rtlCol="0" anchor="ctr"/>
+          <a:lstStyle/>
+          <a:p>
+            <a:pPr algn="ctr"/>
+          </a:p>
+        </p:txBody>
+      </p:sp>
+      <p:sp>
+        <p:nvSpPr>
+          <p:cNvPr id="14" name="TextBox 13"/>
+          <p:cNvSpPr txBox="1"/>
+          <p:nvPr/>
+        </p:nvSpPr>
+        <p:spPr>
+          <a:xfrm>
+            <a:off x="5082235" y="2852928"/>
+            <a:ext cx="1997049" cy="640080"/>
+          </a:xfrm>
+          <a:prstGeom prst="rect">
+            <a:avLst/>
+          </a:prstGeom>
+          <a:noFill/>
+        </p:spPr>
+        <p:txBody>
+          <a:bodyPr wrap="square" anchor="t" lIns="0" rIns="0" tIns="0" bIns="0">
+            <a:spAutoFit/>
+          </a:bodyPr>
+          <a:lstStyle/>
+          <a:p>
+            <a:pPr algn="ctr">
+              <a:lnSpc>
+                <a:spcPct val="125000"/>
+              </a:lnSpc>
+              <a:spcBef>
+                <a:spcPts val="0"/>
+              </a:spcBef>
+              <a:spcAft>
+                <a:spcPts val="600"/>
+              </a:spcAft>
+            </a:pPr>
+            <a:r>
+              <a:rPr sz="3400" b="1">
+                <a:solidFill>
+                  <a:srgbClr val="3DCD58"/>
+                </a:solidFill>
+                <a:latin typeface="Arial"/>
+              </a:rPr>
+              <a:t>5</a:t>
+            </a:r>
+          </a:p>
+        </p:txBody>
+      </p:sp>
+      <p:sp>
+        <p:nvSpPr>
+          <p:cNvPr id="15" name="TextBox 14"/>
+          <p:cNvSpPr txBox="1"/>
+          <p:nvPr/>
+        </p:nvSpPr>
+        <p:spPr>
+          <a:xfrm>
+            <a:off x="5191963" y="3520440"/>
+            <a:ext cx="1777593" cy="457200"/>
+          </a:xfrm>
+          <a:prstGeom prst="rect">
+            <a:avLst/>
+          </a:prstGeom>
+          <a:noFill/>
+        </p:spPr>
+        <p:txBody>
+          <a:bodyPr wrap="square" anchor="t" lIns="0" rIns="0" tIns="0" bIns="0">
+            <a:spAutoFit/>
+          </a:bodyPr>
+          <a:lstStyle/>
+          <a:p>
+            <a:pPr algn="ctr">
+              <a:lnSpc>
+                <a:spcPct val="115000"/>
+              </a:lnSpc>
+              <a:spcBef>
+                <a:spcPts val="0"/>
+              </a:spcBef>
+              <a:spcAft>
+                <a:spcPts val="600"/>
+              </a:spcAft>
+            </a:pPr>
+            <a:r>
+              <a:rPr sz="1150" b="0">
+                <a:solidFill>
+                  <a:srgbClr val="5A6673"/>
+                </a:solidFill>
+                <a:latin typeface="Arial"/>
+              </a:rPr>
+              <a:t>alarms</a:t>
+            </a:r>
+          </a:p>
+        </p:txBody>
+      </p:sp>
+      <p:sp>
+        <p:nvSpPr>
+          <p:cNvPr id="16" name="Rectangle 15"/>
+          <p:cNvSpPr/>
+          <p:nvPr/>
+        </p:nvSpPr>
+        <p:spPr>
+          <a:xfrm>
+            <a:off x="7280452" y="2651760"/>
+            <a:ext cx="1997049" cy="1417320"/>
+          </a:xfrm>
+          <a:prstGeom prst="rect">
+            <a:avLst/>
+          </a:prstGeom>
+          <a:solidFill>
+            <a:srgbClr val="F4F6F8"/>
+          </a:solidFill>
+          <a:ln w="12700">
+            <a:solidFill>
+              <a:srgbClr val="D8DEE5"/>
+            </a:solidFill>
+          </a:ln>
+          <a:effectLst/>
+        </p:spPr>
+        <p:style>
+          <a:lnRef idx="1">
+            <a:schemeClr val="accent1"/>
+          </a:lnRef>
+          <a:fillRef idx="3">
+            <a:schemeClr val="accent1"/>
+          </a:fillRef>
+          <a:effectRef idx="2">
+            <a:schemeClr val="accent1"/>
+          </a:effectRef>
+          <a:fontRef idx="minor">
+            <a:schemeClr val="lt1"/>
+          </a:fontRef>
+        </p:style>
+        <p:txBody>
+          <a:bodyPr rtlCol="0" anchor="ctr"/>
+          <a:lstStyle/>
+          <a:p>
+            <a:pPr algn="ctr"/>
+          </a:p>
+        </p:txBody>
+      </p:sp>
+      <p:sp>
+        <p:nvSpPr>
+          <p:cNvPr id="17" name="TextBox 16"/>
+          <p:cNvSpPr txBox="1"/>
+          <p:nvPr/>
+        </p:nvSpPr>
+        <p:spPr>
+          <a:xfrm>
+            <a:off x="7280452" y="2852928"/>
+            <a:ext cx="1997049" cy="640080"/>
+          </a:xfrm>
+          <a:prstGeom prst="rect">
+            <a:avLst/>
+          </a:prstGeom>
+          <a:noFill/>
+        </p:spPr>
+        <p:txBody>
+          <a:bodyPr wrap="square" anchor="t" lIns="0" rIns="0" tIns="0" bIns="0">
+            <a:spAutoFit/>
+          </a:bodyPr>
+          <a:lstStyle/>
+          <a:p>
+            <a:pPr algn="ctr">
+              <a:lnSpc>
+                <a:spcPct val="125000"/>
+              </a:lnSpc>
+              <a:spcBef>
+                <a:spcPts val="0"/>
+              </a:spcBef>
+              <a:spcAft>
+                <a:spcPts val="600"/>
+              </a:spcAft>
+            </a:pPr>
+            <a:r>
+              <a:rPr sz="3400" b="1">
+                <a:solidFill>
+                  <a:srgbClr val="3DCD58"/>
+                </a:solidFill>
+                <a:latin typeface="Arial"/>
+              </a:rPr>
+              <a:t>11</a:t>
+            </a:r>
+          </a:p>
+        </p:txBody>
+      </p:sp>
+      <p:sp>
+        <p:nvSpPr>
+          <p:cNvPr id="18" name="TextBox 17"/>
+          <p:cNvSpPr txBox="1"/>
+          <p:nvPr/>
+        </p:nvSpPr>
+        <p:spPr>
+          <a:xfrm>
+            <a:off x="7390180" y="3520440"/>
+            <a:ext cx="1777593" cy="457200"/>
+          </a:xfrm>
+          <a:prstGeom prst="rect">
+            <a:avLst/>
+          </a:prstGeom>
+          <a:noFill/>
+        </p:spPr>
+        <p:txBody>
+          <a:bodyPr wrap="square" anchor="t" lIns="0" rIns="0" tIns="0" bIns="0">
+            <a:spAutoFit/>
+          </a:bodyPr>
+          <a:lstStyle/>
+          <a:p>
+            <a:pPr algn="ctr">
+              <a:lnSpc>
+                <a:spcPct val="115000"/>
+              </a:lnSpc>
+              <a:spcBef>
+                <a:spcPts val="0"/>
+              </a:spcBef>
+              <a:spcAft>
+                <a:spcPts val="600"/>
+              </a:spcAft>
+            </a:pPr>
+            <a:r>
+              <a:rPr sz="1150" b="0">
+                <a:solidFill>
+                  <a:srgbClr val="5A6673"/>
+                </a:solidFill>
+                <a:latin typeface="Arial"/>
+              </a:rPr>
+              <a:t>bindings</a:t>
+            </a:r>
+          </a:p>
+        </p:txBody>
+      </p:sp>
+      <p:sp>
+        <p:nvSpPr>
+          <p:cNvPr id="19" name="Rectangle 18"/>
+          <p:cNvSpPr/>
+          <p:nvPr/>
+        </p:nvSpPr>
+        <p:spPr>
+          <a:xfrm>
+            <a:off x="9478670" y="2651760"/>
+            <a:ext cx="1997049" cy="1417320"/>
+          </a:xfrm>
+          <a:prstGeom prst="rect">
+            <a:avLst/>
+          </a:prstGeom>
+          <a:solidFill>
+            <a:srgbClr val="F4F6F8"/>
+          </a:solidFill>
+          <a:ln w="12700">
+            <a:solidFill>
+              <a:srgbClr val="D8DEE5"/>
+            </a:solidFill>
+          </a:ln>
+          <a:effectLst/>
+        </p:spPr>
+        <p:style>
+          <a:lnRef idx="1">
+            <a:schemeClr val="accent1"/>
+          </a:lnRef>
+          <a:fillRef idx="3">
+            <a:schemeClr val="accent1"/>
+          </a:fillRef>
+          <a:effectRef idx="2">
+            <a:schemeClr val="accent1"/>
+          </a:effectRef>
+          <a:fontRef idx="minor">
+            <a:schemeClr val="lt1"/>
+          </a:fontRef>
+        </p:style>
+        <p:txBody>
+          <a:bodyPr rtlCol="0" anchor="ctr"/>
+          <a:lstStyle/>
+          <a:p>
+            <a:pPr algn="ctr"/>
+          </a:p>
+        </p:txBody>
+      </p:sp>
+      <p:sp>
+        <p:nvSpPr>
+          <p:cNvPr id="20" name="TextBox 19"/>
+          <p:cNvSpPr txBox="1"/>
+          <p:nvPr/>
+        </p:nvSpPr>
+        <p:spPr>
+          <a:xfrm>
+            <a:off x="9478670" y="2852928"/>
+            <a:ext cx="1997049" cy="640080"/>
+          </a:xfrm>
+          <a:prstGeom prst="rect">
+            <a:avLst/>
+          </a:prstGeom>
+          <a:noFill/>
+        </p:spPr>
+        <p:txBody>
+          <a:bodyPr wrap="square" anchor="t" lIns="0" rIns="0" tIns="0" bIns="0">
+            <a:spAutoFit/>
+          </a:bodyPr>
+          <a:lstStyle/>
+          <a:p>
+            <a:pPr algn="ctr">
+              <a:lnSpc>
+                <a:spcPct val="125000"/>
+              </a:lnSpc>
+              <a:spcBef>
+                <a:spcPts val="0"/>
+              </a:spcBef>
+              <a:spcAft>
+                <a:spcPts val="600"/>
+              </a:spcAft>
+            </a:pPr>
+            <a:r>
+              <a:rPr sz="3400" b="1">
+                <a:solidFill>
+                  <a:srgbClr val="3DCD58"/>
+                </a:solidFill>
+                <a:latin typeface="Arial"/>
+              </a:rPr>
+              <a:t>0</a:t>
+            </a:r>
+          </a:p>
+        </p:txBody>
+      </p:sp>
+      <p:sp>
+        <p:nvSpPr>
+          <p:cNvPr id="21" name="TextBox 20"/>
+          <p:cNvSpPr txBox="1"/>
+          <p:nvPr/>
+        </p:nvSpPr>
+        <p:spPr>
+          <a:xfrm>
+            <a:off x="9588398" y="3520440"/>
+            <a:ext cx="1777593" cy="457200"/>
+          </a:xfrm>
+          <a:prstGeom prst="rect">
+            <a:avLst/>
+          </a:prstGeom>
+          <a:noFill/>
+        </p:spPr>
+        <p:txBody>
+          <a:bodyPr wrap="square" anchor="t" lIns="0" rIns="0" tIns="0" bIns="0">
+            <a:spAutoFit/>
+          </a:bodyPr>
+          <a:lstStyle/>
+          <a:p>
+            <a:pPr algn="ctr">
+              <a:lnSpc>
+                <a:spcPct val="115000"/>
+              </a:lnSpc>
+              <a:spcBef>
+                <a:spcPts val="0"/>
+              </a:spcBef>
+              <a:spcAft>
+                <a:spcPts val="600"/>
+              </a:spcAft>
+            </a:pPr>
+            <a:r>
+              <a:rPr sz="1150" b="0">
+                <a:solidFill>
+                  <a:srgbClr val="5A6673"/>
+                </a:solidFill>
+                <a:latin typeface="Arial"/>
+              </a:rPr>
+              <a:t>placed by hand</a:t>
+            </a:r>
+          </a:p>
+        </p:txBody>
+      </p:sp>
+      <p:sp>
+        <p:nvSpPr>
+          <p:cNvPr id="22" name="Rectangle 21"/>
+          <p:cNvSpPr/>
+          <p:nvPr/>
+        </p:nvSpPr>
+        <p:spPr>
+          <a:xfrm>
+            <a:off x="685800" y="4343400"/>
+            <a:ext cx="2546604" cy="1417320"/>
+          </a:xfrm>
+          <a:prstGeom prst="rect">
+            <a:avLst/>
+          </a:prstGeom>
+          <a:solidFill>
+            <a:srgbClr val="F4F6F8"/>
+          </a:solidFill>
+          <a:ln w="12700">
+            <a:solidFill>
+              <a:srgbClr val="D8DEE5"/>
+            </a:solidFill>
+          </a:ln>
+          <a:effectLst/>
+        </p:spPr>
+        <p:style>
+          <a:lnRef idx="1">
+            <a:schemeClr val="accent1"/>
+          </a:lnRef>
+          <a:fillRef idx="3">
+            <a:schemeClr val="accent1"/>
+          </a:fillRef>
+          <a:effectRef idx="2">
+            <a:schemeClr val="accent1"/>
+          </a:effectRef>
+          <a:fontRef idx="minor">
+            <a:schemeClr val="lt1"/>
+          </a:fontRef>
+        </p:style>
+        <p:txBody>
+          <a:bodyPr rtlCol="0" anchor="ctr"/>
+          <a:lstStyle/>
+          <a:p>
+            <a:pPr algn="ctr"/>
+          </a:p>
+        </p:txBody>
+      </p:sp>
+      <p:sp>
+        <p:nvSpPr>
+          <p:cNvPr id="23" name="TextBox 22"/>
+          <p:cNvSpPr txBox="1"/>
+          <p:nvPr/>
+        </p:nvSpPr>
+        <p:spPr>
+          <a:xfrm>
+            <a:off x="685800" y="4544568"/>
+            <a:ext cx="2546604" cy="640080"/>
+          </a:xfrm>
+          <a:prstGeom prst="rect">
+            <a:avLst/>
+          </a:prstGeom>
+          <a:noFill/>
+        </p:spPr>
+        <p:txBody>
+          <a:bodyPr wrap="square" anchor="t" lIns="0" rIns="0" tIns="0" bIns="0">
+            <a:spAutoFit/>
+          </a:bodyPr>
+          <a:lstStyle/>
+          <a:p>
+            <a:pPr algn="ctr">
+              <a:lnSpc>
+                <a:spcPct val="125000"/>
+              </a:lnSpc>
+              <a:spcBef>
+                <a:spcPts val="0"/>
+              </a:spcBef>
+              <a:spcAft>
+                <a:spcPts val="600"/>
+              </a:spcAft>
+            </a:pPr>
+            <a:r>
+              <a:rPr sz="3400" b="1">
+                <a:solidFill>
+                  <a:srgbClr val="3DCD58"/>
+                </a:solidFill>
+                <a:latin typeface="Arial"/>
+              </a:rPr>
+              <a:t>467</a:t>
+            </a:r>
+          </a:p>
+        </p:txBody>
+      </p:sp>
+      <p:sp>
+        <p:nvSpPr>
+          <p:cNvPr id="24" name="TextBox 23"/>
+          <p:cNvSpPr txBox="1"/>
+          <p:nvPr/>
+        </p:nvSpPr>
+        <p:spPr>
+          <a:xfrm>
+            <a:off x="795528" y="5212080"/>
+            <a:ext cx="2327148" cy="457200"/>
+          </a:xfrm>
+          <a:prstGeom prst="rect">
+            <a:avLst/>
+          </a:prstGeom>
+          <a:noFill/>
+        </p:spPr>
+        <p:txBody>
+          <a:bodyPr wrap="square" anchor="t" lIns="0" rIns="0" tIns="0" bIns="0">
+            <a:spAutoFit/>
+          </a:bodyPr>
+          <a:lstStyle/>
+          <a:p>
+            <a:pPr algn="ctr">
+              <a:lnSpc>
+                <a:spcPct val="115000"/>
+              </a:lnSpc>
+              <a:spcBef>
+                <a:spcPts val="0"/>
+              </a:spcBef>
+              <a:spcAft>
+                <a:spcPts val="600"/>
+              </a:spcAft>
+            </a:pPr>
+            <a:r>
+              <a:rPr sz="1150" b="0">
+                <a:solidFill>
+                  <a:srgbClr val="5A6673"/>
+                </a:solidFill>
+                <a:latin typeface="Arial"/>
+              </a:rPr>
+              <a:t>tests</a:t>
+            </a:r>
+          </a:p>
+        </p:txBody>
+      </p:sp>
+      <p:sp>
+        <p:nvSpPr>
+          <p:cNvPr id="25" name="Rectangle 24"/>
+          <p:cNvSpPr/>
+          <p:nvPr/>
+        </p:nvSpPr>
+        <p:spPr>
+          <a:xfrm>
+            <a:off x="3433572" y="4343400"/>
+            <a:ext cx="2546604" cy="1417320"/>
+          </a:xfrm>
+          <a:prstGeom prst="rect">
+            <a:avLst/>
+          </a:prstGeom>
+          <a:solidFill>
+            <a:srgbClr val="F4F6F8"/>
+          </a:solidFill>
+          <a:ln w="12700">
+            <a:solidFill>
+              <a:srgbClr val="D8DEE5"/>
+            </a:solidFill>
+          </a:ln>
+          <a:effectLst/>
+        </p:spPr>
+        <p:style>
+          <a:lnRef idx="1">
+            <a:schemeClr val="accent1"/>
+          </a:lnRef>
+          <a:fillRef idx="3">
+            <a:schemeClr val="accent1"/>
+          </a:fillRef>
+          <a:effectRef idx="2">
+            <a:schemeClr val="accent1"/>
+          </a:effectRef>
+          <a:fontRef idx="minor">
+            <a:schemeClr val="lt1"/>
+          </a:fontRef>
+        </p:style>
+        <p:txBody>
+          <a:bodyPr rtlCol="0" anchor="ctr"/>
+          <a:lstStyle/>
+          <a:p>
+            <a:pPr algn="ctr"/>
+          </a:p>
+        </p:txBody>
+      </p:sp>
+      <p:sp>
+        <p:nvSpPr>
+          <p:cNvPr id="26" name="TextBox 25"/>
+          <p:cNvSpPr txBox="1"/>
+          <p:nvPr/>
+        </p:nvSpPr>
+        <p:spPr>
+          <a:xfrm>
+            <a:off x="3433572" y="4544568"/>
+            <a:ext cx="2546604" cy="640080"/>
+          </a:xfrm>
+          <a:prstGeom prst="rect">
+            <a:avLst/>
+          </a:prstGeom>
+          <a:noFill/>
+        </p:spPr>
+        <p:txBody>
+          <a:bodyPr wrap="square" anchor="t" lIns="0" rIns="0" tIns="0" bIns="0">
+            <a:spAutoFit/>
+          </a:bodyPr>
+          <a:lstStyle/>
+          <a:p>
+            <a:pPr algn="ctr">
+              <a:lnSpc>
+                <a:spcPct val="125000"/>
+              </a:lnSpc>
+              <a:spcBef>
+                <a:spcPts val="0"/>
+              </a:spcBef>
+              <a:spcAft>
+                <a:spcPts val="600"/>
+              </a:spcAft>
+            </a:pPr>
+            <a:r>
+              <a:rPr sz="3400" b="1">
+                <a:solidFill>
+                  <a:srgbClr val="3DCD58"/>
+                </a:solidFill>
+                <a:latin typeface="Arial"/>
+              </a:rPr>
+              <a:t>474</a:t>
+            </a:r>
+          </a:p>
+        </p:txBody>
+      </p:sp>
+      <p:sp>
+        <p:nvSpPr>
+          <p:cNvPr id="27" name="TextBox 26"/>
+          <p:cNvSpPr txBox="1"/>
+          <p:nvPr/>
+        </p:nvSpPr>
+        <p:spPr>
+          <a:xfrm>
+            <a:off x="3543300" y="5212080"/>
+            <a:ext cx="2327148" cy="457200"/>
+          </a:xfrm>
+          <a:prstGeom prst="rect">
+            <a:avLst/>
+          </a:prstGeom>
+          <a:noFill/>
+        </p:spPr>
+        <p:txBody>
+          <a:bodyPr wrap="square" anchor="t" lIns="0" rIns="0" tIns="0" bIns="0">
+            <a:spAutoFit/>
+          </a:bodyPr>
+          <a:lstStyle/>
+          <a:p>
+            <a:pPr algn="ctr">
+              <a:lnSpc>
+                <a:spcPct val="115000"/>
+              </a:lnSpc>
+              <a:spcBef>
+                <a:spcPts val="0"/>
+              </a:spcBef>
+              <a:spcAft>
+                <a:spcPts val="600"/>
+              </a:spcAft>
+            </a:pPr>
+            <a:r>
+              <a:rPr sz="1150" b="0">
+                <a:solidFill>
+                  <a:srgbClr val="5A6673"/>
+                </a:solidFill>
+                <a:latin typeface="Arial"/>
+              </a:rPr>
+              <a:t>shipped symbols indexed</a:t>
+            </a:r>
+          </a:p>
+        </p:txBody>
+      </p:sp>
+      <p:sp>
+        <p:nvSpPr>
+          <p:cNvPr id="28" name="Rectangle 27"/>
+          <p:cNvSpPr/>
+          <p:nvPr/>
+        </p:nvSpPr>
+        <p:spPr>
+          <a:xfrm>
+            <a:off x="6181344" y="4343400"/>
+            <a:ext cx="2546604" cy="1417320"/>
+          </a:xfrm>
+          <a:prstGeom prst="rect">
+            <a:avLst/>
+          </a:prstGeom>
+          <a:solidFill>
+            <a:srgbClr val="F4F6F8"/>
+          </a:solidFill>
+          <a:ln w="12700">
+            <a:solidFill>
+              <a:srgbClr val="D8DEE5"/>
+            </a:solidFill>
+          </a:ln>
+          <a:effectLst/>
+        </p:spPr>
+        <p:style>
+          <a:lnRef idx="1">
+            <a:schemeClr val="accent1"/>
+          </a:lnRef>
+          <a:fillRef idx="3">
+            <a:schemeClr val="accent1"/>
+          </a:fillRef>
+          <a:effectRef idx="2">
+            <a:schemeClr val="accent1"/>
+          </a:effectRef>
+          <a:fontRef idx="minor">
+            <a:schemeClr val="lt1"/>
+          </a:fontRef>
+        </p:style>
+        <p:txBody>
+          <a:bodyPr rtlCol="0" anchor="ctr"/>
+          <a:lstStyle/>
+          <a:p>
+            <a:pPr algn="ctr"/>
+          </a:p>
+        </p:txBody>
+      </p:sp>
+      <p:sp>
+        <p:nvSpPr>
+          <p:cNvPr id="29" name="TextBox 28"/>
+          <p:cNvSpPr txBox="1"/>
+          <p:nvPr/>
+        </p:nvSpPr>
+        <p:spPr>
+          <a:xfrm>
+            <a:off x="6181344" y="4544568"/>
+            <a:ext cx="2546604" cy="640080"/>
+          </a:xfrm>
+          <a:prstGeom prst="rect">
+            <a:avLst/>
+          </a:prstGeom>
+          <a:noFill/>
+        </p:spPr>
+        <p:txBody>
+          <a:bodyPr wrap="square" anchor="t" lIns="0" rIns="0" tIns="0" bIns="0">
+            <a:spAutoFit/>
+          </a:bodyPr>
+          <a:lstStyle/>
+          <a:p>
+            <a:pPr algn="ctr">
+              <a:lnSpc>
+                <a:spcPct val="125000"/>
+              </a:lnSpc>
+              <a:spcBef>
+                <a:spcPts val="0"/>
+              </a:spcBef>
+              <a:spcAft>
+                <a:spcPts val="600"/>
+              </a:spcAft>
+            </a:pPr>
+            <a:r>
+              <a:rPr sz="3400" b="1">
+                <a:solidFill>
+                  <a:srgbClr val="3DCD58"/>
+                </a:solidFill>
+                <a:latin typeface="Arial"/>
+              </a:rPr>
+              <a:t>50</a:t>
+            </a:r>
+          </a:p>
+        </p:txBody>
+      </p:sp>
+      <p:sp>
+        <p:nvSpPr>
+          <p:cNvPr id="30" name="TextBox 29"/>
+          <p:cNvSpPr txBox="1"/>
+          <p:nvPr/>
+        </p:nvSpPr>
+        <p:spPr>
+          <a:xfrm>
+            <a:off x="6291072" y="5212080"/>
+            <a:ext cx="2327148" cy="457200"/>
+          </a:xfrm>
+          <a:prstGeom prst="rect">
+            <a:avLst/>
+          </a:prstGeom>
+          <a:noFill/>
+        </p:spPr>
+        <p:txBody>
+          <a:bodyPr wrap="square" anchor="t" lIns="0" rIns="0" tIns="0" bIns="0">
+            <a:spAutoFit/>
+          </a:bodyPr>
+          <a:lstStyle/>
+          <a:p>
+            <a:pPr algn="ctr">
+              <a:lnSpc>
+                <a:spcPct val="115000"/>
+              </a:lnSpc>
+              <a:spcBef>
+                <a:spcPts val="0"/>
+              </a:spcBef>
+              <a:spcAft>
+                <a:spcPts val="600"/>
+              </a:spcAft>
+            </a:pPr>
+            <a:r>
+              <a:rPr sz="1150" b="0">
+                <a:solidFill>
+                  <a:srgbClr val="5A6673"/>
+                </a:solidFill>
+                <a:latin typeface="Arial"/>
+              </a:rPr>
+              <a:t>real part types extracted</a:t>
+            </a:r>
+          </a:p>
+        </p:txBody>
+      </p:sp>
+      <p:sp>
+        <p:nvSpPr>
+          <p:cNvPr id="31" name="Rectangle 30"/>
+          <p:cNvSpPr/>
+          <p:nvPr/>
+        </p:nvSpPr>
+        <p:spPr>
+          <a:xfrm>
+            <a:off x="8929116" y="4343400"/>
+            <a:ext cx="2546604" cy="1417320"/>
+          </a:xfrm>
+          <a:prstGeom prst="rect">
+            <a:avLst/>
+          </a:prstGeom>
+          <a:solidFill>
+            <a:srgbClr val="F4F6F8"/>
+          </a:solidFill>
+          <a:ln w="12700">
+            <a:solidFill>
+              <a:srgbClr val="D8DEE5"/>
+            </a:solidFill>
+          </a:ln>
+          <a:effectLst/>
+        </p:spPr>
+        <p:style>
+          <a:lnRef idx="1">
+            <a:schemeClr val="accent1"/>
+          </a:lnRef>
+          <a:fillRef idx="3">
+            <a:schemeClr val="accent1"/>
+          </a:fillRef>
+          <a:effectRef idx="2">
+            <a:schemeClr val="accent1"/>
+          </a:effectRef>
+          <a:fontRef idx="minor">
+            <a:schemeClr val="lt1"/>
+          </a:fontRef>
+        </p:style>
+        <p:txBody>
+          <a:bodyPr rtlCol="0" anchor="ctr"/>
+          <a:lstStyle/>
+          <a:p>
+            <a:pPr algn="ctr"/>
+          </a:p>
+        </p:txBody>
+      </p:sp>
+      <p:sp>
+        <p:nvSpPr>
+          <p:cNvPr id="32" name="TextBox 31"/>
+          <p:cNvSpPr txBox="1"/>
+          <p:nvPr/>
+        </p:nvSpPr>
+        <p:spPr>
+          <a:xfrm>
+            <a:off x="8929116" y="4544568"/>
+            <a:ext cx="2546604" cy="640080"/>
+          </a:xfrm>
+          <a:prstGeom prst="rect">
+            <a:avLst/>
+          </a:prstGeom>
+          <a:noFill/>
+        </p:spPr>
+        <p:txBody>
+          <a:bodyPr wrap="square" anchor="t" lIns="0" rIns="0" tIns="0" bIns="0">
+            <a:spAutoFit/>
+          </a:bodyPr>
+          <a:lstStyle/>
+          <a:p>
+            <a:pPr algn="ctr">
+              <a:lnSpc>
+                <a:spcPct val="125000"/>
+              </a:lnSpc>
+              <a:spcBef>
+                <a:spcPts val="0"/>
+              </a:spcBef>
+              <a:spcAft>
+                <a:spcPts val="600"/>
+              </a:spcAft>
+            </a:pPr>
+            <a:r>
+              <a:rPr sz="3400" b="1">
+                <a:solidFill>
+                  <a:srgbClr val="3DCD58"/>
+                </a:solidFill>
+                <a:latin typeface="Arial"/>
+              </a:rPr>
+              <a:t>2</a:t>
+            </a:r>
+          </a:p>
+        </p:txBody>
+      </p:sp>
+      <p:sp>
+        <p:nvSpPr>
+          <p:cNvPr id="33" name="TextBox 32"/>
+          <p:cNvSpPr txBox="1"/>
+          <p:nvPr/>
+        </p:nvSpPr>
+        <p:spPr>
+          <a:xfrm>
+            <a:off x="9038844" y="5212080"/>
+            <a:ext cx="2327148" cy="457200"/>
+          </a:xfrm>
+          <a:prstGeom prst="rect">
+            <a:avLst/>
+          </a:prstGeom>
+          <a:noFill/>
+        </p:spPr>
+        <p:txBody>
+          <a:bodyPr wrap="square" anchor="t" lIns="0" rIns="0" tIns="0" bIns="0">
+            <a:spAutoFit/>
+          </a:bodyPr>
+          <a:lstStyle/>
+          <a:p>
+            <a:pPr algn="ctr">
+              <a:lnSpc>
+                <a:spcPct val="115000"/>
+              </a:lnSpc>
+              <a:spcBef>
+                <a:spcPts val="0"/>
+              </a:spcBef>
+              <a:spcAft>
+                <a:spcPts val="600"/>
+              </a:spcAft>
+            </a:pPr>
+            <a:r>
+              <a:rPr sz="1150" b="0">
+                <a:solidFill>
+                  <a:srgbClr val="5A6673"/>
+                </a:solidFill>
+                <a:latin typeface="Arial"/>
+              </a:rPr>
+              <a:t>independent packagers
+that agree</a:t>
+            </a:r>
+          </a:p>
+        </p:txBody>
+      </p:sp>
+      <p:sp>
+        <p:nvSpPr>
+          <p:cNvPr id="34" name="TextBox 33"/>
+          <p:cNvSpPr txBox="1"/>
+          <p:nvPr/>
+        </p:nvSpPr>
+        <p:spPr>
+          <a:xfrm>
+            <a:off x="685800" y="5943600"/>
+            <a:ext cx="10789920" cy="640080"/>
+          </a:xfrm>
+          <a:prstGeom prst="rect">
+            <a:avLst/>
+          </a:prstGeom>
+          <a:noFill/>
+        </p:spPr>
+        <p:txBody>
+          <a:bodyPr wrap="square" anchor="t" lIns="0" rIns="0" tIns="0" bIns="0">
+            <a:spAutoFit/>
+          </a:bodyPr>
+          <a:lstStyle/>
+          <a:p>
+            <a:pPr algn="l">
+              <a:lnSpc>
+                <a:spcPct val="130000"/>
+              </a:lnSpc>
+              <a:spcBef>
+                <a:spcPts val="0"/>
+              </a:spcBef>
+              <a:spcAft>
+                <a:spcPts val="600"/>
+              </a:spcAft>
+            </a:pPr>
+            <a:r>
+              <a:rPr sz="1350" b="0">
+                <a:solidFill>
+                  <a:srgbClr val="5A6673"/>
+                </a:solidFill>
+                <a:latin typeface="Arial"/>
+              </a:rPr>
+              <a:t>A Python reference and a TypeScript packager, structurally diffed against each other. Two implementations agreeing is a stronger claim than either passing its own tests.</a:t>
+            </a:r>
+          </a:p>
+        </p:txBody>
+      </p:sp>
+    </p:spTree>
+  </p:cSld>
+  <p:clrMapOvr>
+    <a:masterClrMapping/>
+  </p:clrMapOvr>
+</p:sld>
+</file>
+
+<file path=ppt/slides/slide11.xml><?xml version="1.0" encoding="utf-8"?>
+<p:sld xmlns:a="http://schemas.openxmlformats.org/drawingml/2006/main" xmlns:p="http://schemas.openxmlformats.org/presentationml/2006/main" xmlns:r="http://schemas.openxmlformats.org/officeDocument/2006/relationships">
+  <p:cSld>
+    <p:spTree>
+      <p:nvGrpSpPr>
+        <p:cNvPr id="1" name=""/>
+        <p:cNvGrpSpPr/>
+        <p:nvPr/>
+      </p:nvGrpSpPr>
+      <p:grpSpPr/>
+      <p:sp>
+        <p:nvSpPr>
+          <p:cNvPr id="2" name="Rectangle 1"/>
+          <p:cNvSpPr/>
+          <p:nvPr/>
+        </p:nvSpPr>
+        <p:spPr>
+          <a:xfrm>
+            <a:off x="0" y="0"/>
+            <a:ext cx="12191695" cy="6858000"/>
+          </a:xfrm>
+          <a:prstGeom prst="rect">
+            <a:avLst/>
+          </a:prstGeom>
+          <a:solidFill>
+            <a:srgbClr val="FFFFFF"/>
+          </a:solidFill>
+          <a:ln>
+            <a:noFill/>
+          </a:ln>
+          <a:effectLst/>
+        </p:spPr>
+        <p:style>
+          <a:lnRef idx="1">
+            <a:schemeClr val="accent1"/>
+          </a:lnRef>
+          <a:fillRef idx="3">
+            <a:schemeClr val="accent1"/>
+          </a:fillRef>
+          <a:effectRef idx="2">
+            <a:schemeClr val="accent1"/>
+          </a:effectRef>
+          <a:fontRef idx="minor">
+            <a:schemeClr val="lt1"/>
+          </a:fontRef>
+        </p:style>
+        <p:txBody>
+          <a:bodyPr rtlCol="0" anchor="ctr"/>
+          <a:lstStyle/>
+          <a:p>
+            <a:pPr algn="ctr"/>
+          </a:p>
+        </p:txBody>
+      </p:sp>
+      <p:sp>
+        <p:nvSpPr>
+          <p:cNvPr id="3" name="TextBox 2"/>
+          <p:cNvSpPr txBox="1"/>
+          <p:nvPr/>
+        </p:nvSpPr>
+        <p:spPr>
+          <a:xfrm>
+            <a:off x="685800" y="411480"/>
+            <a:ext cx="10789920" cy="274320"/>
+          </a:xfrm>
+          <a:prstGeom prst="rect">
+            <a:avLst/>
+          </a:prstGeom>
+          <a:noFill/>
+        </p:spPr>
+        <p:txBody>
+          <a:bodyPr wrap="square" anchor="t" lIns="0" rIns="0" tIns="0" bIns="0">
+            <a:spAutoFit/>
+          </a:bodyPr>
+          <a:lstStyle/>
+          <a:p>
+            <a:pPr algn="l">
+              <a:lnSpc>
+                <a:spcPct val="125000"/>
+              </a:lnSpc>
+              <a:spcBef>
+                <a:spcPts val="0"/>
+              </a:spcBef>
+              <a:spcAft>
+                <a:spcPts val="600"/>
+              </a:spcAft>
+            </a:pPr>
+            <a:r>
+              <a:rPr sz="1100" b="1">
+                <a:solidFill>
+                  <a:srgbClr val="3DCD58"/>
+                </a:solidFill>
+                <a:latin typeface="Arial"/>
+              </a:rPr>
+              <a:t>07 · BUSINESS PROPOSAL</a:t>
             </a:r>
           </a:p>
         </p:txBody>
@@ -5858,7 +7440,7 @@
         </p:nvSpPr>
         <p:spPr>
           <a:xfrm>
-            <a:off x="685800" y="4069841"/>
+            <a:off x="685800" y="4042409"/>
             <a:ext cx="10789920" cy="1133856"/>
           </a:xfrm>
           <a:prstGeom prst="rect">
@@ -5902,7 +7484,7 @@
         </p:nvSpPr>
         <p:spPr>
           <a:xfrm>
-            <a:off x="941832" y="4252721"/>
+            <a:off x="941832" y="4225289"/>
             <a:ext cx="10332720" cy="859536"/>
           </a:xfrm>
           <a:prstGeom prst="rect">
@@ -5928,7 +7510,7 @@
               </a:spcAft>
             </a:pPr>
             <a:r>
-              <a:rPr sz="1300" b="0">
+              <a:rPr sz="1250" b="0">
                 <a:solidFill>
                   <a:srgbClr val="3DCD58"/>
                 </a:solidFill>
@@ -5950,7 +7532,7 @@
               </a:spcAft>
             </a:pPr>
             <a:r>
-              <a:rPr sz="1300" b="0">
+              <a:rPr sz="1250" b="0">
                 <a:solidFill>
                   <a:srgbClr val="FFFFFF"/>
                 </a:solidFill>
@@ -5972,7 +7554,7 @@
               </a:spcAft>
             </a:pPr>
             <a:r>
-              <a:rPr sz="1300" b="0">
+              <a:rPr sz="1250" b="0">
                 <a:solidFill>
                   <a:srgbClr val="FFFFFF"/>
                 </a:solidFill>
@@ -5991,7 +7573,7 @@
         </p:nvSpPr>
         <p:spPr>
           <a:xfrm>
-            <a:off x="685800" y="5386577"/>
+            <a:off x="685800" y="5340857"/>
             <a:ext cx="10789920" cy="731520"/>
           </a:xfrm>
           <a:prstGeom prst="rect">
@@ -6007,7 +7589,7 @@
           <a:p>
             <a:pPr algn="l">
               <a:lnSpc>
-                <a:spcPct val="130000"/>
+                <a:spcPct val="128000"/>
               </a:lnSpc>
               <a:spcBef>
                 <a:spcPts val="0"/>
@@ -6017,7 +7599,7 @@
               </a:spcAft>
             </a:pPr>
             <a:r>
-              <a:rPr sz="1450" b="1">
+              <a:rPr sz="1400" b="1">
                 <a:solidFill>
                   <a:srgbClr val="3DCD58"/>
                 </a:solidFill>
@@ -6036,7 +7618,7 @@
 </p:sld>
 </file>
 
-<file path=ppt/slides/slide11.xml><?xml version="1.0" encoding="utf-8"?>
+<file path=ppt/slides/slide12.xml><?xml version="1.0" encoding="utf-8"?>
 <p:sld xmlns:a="http://schemas.openxmlformats.org/drawingml/2006/main" xmlns:p="http://schemas.openxmlformats.org/presentationml/2006/main" xmlns:r="http://schemas.openxmlformats.org/officeDocument/2006/relationships">
   <p:cSld>
     <p:spTree>
@@ -6309,7 +7891,7 @@
                 </a:solidFill>
                 <a:latin typeface="Arial"/>
               </a:rPr>
-              <a:t>It is working today, at the file boundary, with no change to the product.</a:t>
+              <a:t>It works today, at the file boundary, with no change to Schneider’s product.</a:t>
             </a:r>
           </a:p>
           <a:p>
@@ -6483,7 +8065,7 @@
                 </a:solidFill>
                 <a:latin typeface="Arial"/>
               </a:rPr>
-              <a:t>THE BRIEF</a:t>
+              <a:t>01 · THE PROBLEM</a:t>
             </a:r>
           </a:p>
         </p:txBody>
@@ -6528,7 +8110,7 @@
                 </a:solidFill>
                 <a:latin typeface="Arial"/>
               </a:rPr>
-              <a:t>Today this is done by hand, and it is done twice</a:t>
+              <a:t>Today this is done by hand, every time</a:t>
             </a:r>
           </a:p>
         </p:txBody>
@@ -6587,7 +8169,7 @@
         </p:nvGraphicFramePr>
         <p:xfrm>
           <a:off x="685800" y="1874519"/>
-          <a:ext cx="10789920" cy="2443734"/>
+          <a:ext cx="10789919" cy="2624328"/>
         </p:xfrm>
         <a:graphic>
           <a:graphicData uri="http://schemas.openxmlformats.org/drawingml/2006/table">
@@ -6596,8 +8178,8 @@
                 <a:tableStyleId>{5C22544A-7EE6-4342-B048-85BDC9FD1C3A}</a:tableStyleId>
               </a:tblPr>
               <a:tblGrid>
-                <a:gridCol w="2877312"/>
-                <a:gridCol w="7912608"/>
+                <a:gridCol w="2967228"/>
+                <a:gridCol w="7822691"/>
               </a:tblGrid>
               <a:tr h="365760">
                 <a:tc>
@@ -6612,7 +8194,7 @@
                           </a:solidFill>
                           <a:latin typeface="Arial"/>
                         </a:rPr>
-                        <a:t>The work</a:t>
+                        <a:t>The cost the brief names</a:t>
                       </a:r>
                     </a:p>
                   </a:txBody>
@@ -6634,7 +8216,7 @@
                           </a:solidFill>
                           <a:latin typeface="Arial"/>
                         </a:rPr>
-                        <a:t>What it looks like</a:t>
+                        <a:t>What it looks like on a real project</a:t>
                       </a:r>
                     </a:p>
                   </a:txBody>
@@ -6783,7 +8365,7 @@
                   </a:tcPr>
                 </a:tc>
               </a:tr>
-              <a:tr h="384048">
+              <a:tr h="564642">
                 <a:tc>
                   <a:txBody>
                     <a:bodyPr wrap="square"/>
@@ -6841,7 +8423,7 @@
         </p:nvSpPr>
         <p:spPr>
           <a:xfrm>
-            <a:off x="685800" y="4592573"/>
+            <a:off x="685800" y="4754879"/>
             <a:ext cx="10789920" cy="914400"/>
           </a:xfrm>
           <a:prstGeom prst="rect">
@@ -6885,7 +8467,7 @@
         </p:nvSpPr>
         <p:spPr>
           <a:xfrm>
-            <a:off x="1051560" y="4793741"/>
+            <a:off x="1051560" y="4956047"/>
             <a:ext cx="10058400" cy="548640"/>
           </a:xfrm>
           <a:prstGeom prst="rect">
@@ -7024,7 +8606,7 @@
                 </a:solidFill>
                 <a:latin typeface="Arial"/>
               </a:rPr>
-              <a:t>WHY THIS IS POSSIBLE AT ALL</a:t>
+              <a:t>02 · THE SOLUTION</a:t>
             </a:r>
           </a:p>
         </p:txBody>
@@ -7063,13 +8645,13 @@
               </a:spcAft>
             </a:pPr>
             <a:r>
-              <a:rPr sz="3000" b="1">
+              <a:rPr sz="2600" b="1">
                 <a:solidFill>
                   <a:srgbClr val="1A1F26"/>
                 </a:solidFill>
                 <a:latin typeface="Arial"/>
               </a:rPr>
-              <a:t>The project format is fully legible</a:t>
+              <a:t>A tag export and a sentence become a finished project</a:t>
             </a:r>
           </a:p>
         </p:txBody>
@@ -7127,7 +8709,7 @@
         <p:spPr>
           <a:xfrm>
             <a:off x="685800" y="1783080"/>
-            <a:ext cx="10789920" cy="1901952"/>
+            <a:ext cx="10789920" cy="2414016"/>
           </a:xfrm>
           <a:prstGeom prst="rect">
             <a:avLst/>
@@ -7171,7 +8753,7 @@
         <p:spPr>
           <a:xfrm>
             <a:off x="941832" y="1965960"/>
-            <a:ext cx="10332720" cy="1627632"/>
+            <a:ext cx="10332720" cy="2139696"/>
           </a:xfrm>
           <a:prstGeom prst="rect">
             <a:avLst/>
@@ -7196,13 +8778,13 @@
               </a:spcAft>
             </a:pPr>
             <a:r>
-              <a:rPr sz="1300" b="0">
+              <a:rPr sz="1250" b="0">
                 <a:solidFill>
                   <a:srgbClr val="FFFFFF"/>
                 </a:solidFill>
                 <a:latin typeface="Consolas"/>
               </a:rPr>
-              <a:t>&lt;project&gt;.eote                 ZIP    (nested entries use BACKSLASH separators)</a:t>
+              <a:t>   PLC tag export  (.csv / .xlsx / symbol file) ---+</a:t>
             </a:r>
           </a:p>
           <a:p>
@@ -7218,13 +8800,13 @@
               </a:spcAft>
             </a:pPr>
             <a:r>
-              <a:rPr sz="1300" b="0">
+              <a:rPr sz="1250" b="0">
                 <a:solidFill>
                   <a:srgbClr val="FFFFFF"/>
                 </a:solidFill>
                 <a:latin typeface="Consolas"/>
               </a:rPr>
-              <a:t> |-- Project.dat, Target.dat   JSON   panel model, resolution</a:t>
+              <a:t>                                                   |</a:t>
             </a:r>
           </a:p>
           <a:p>
@@ -7240,13 +8822,13 @@
               </a:spcAft>
             </a:pPr>
             <a:r>
-              <a:rPr sz="1300" b="0">
+              <a:rPr sz="1250" b="0">
                 <a:solidFill>
                   <a:srgbClr val="FFFFFF"/>
                 </a:solidFill>
                 <a:latin typeface="Consolas"/>
               </a:rPr>
-              <a:t> |-- Variables.db              SQLite the tags</a:t>
+              <a:t>   "Two pump station with running lamps,        ---+---&gt; HMI COPILOT ---&gt; project.eote</a:t>
             </a:r>
           </a:p>
           <a:p>
@@ -7262,13 +8844,13 @@
               </a:spcAft>
             </a:pPr>
             <a:r>
-              <a:rPr sz="1300" b="0">
+              <a:rPr sz="1250" b="0">
                 <a:solidFill>
                   <a:srgbClr val="FFFFFF"/>
                 </a:solidFill>
                 <a:latin typeface="Consolas"/>
               </a:rPr>
-              <a:t> |-- Alarm.db                  SQLite alarm groups and alarms</a:t>
+              <a:t>    a flow display and a high-level alarm"         |          |           validation report</a:t>
             </a:r>
           </a:p>
           <a:p>
@@ -7284,13 +8866,13 @@
               </a:spcAft>
             </a:pPr>
             <a:r>
-              <a:rPr sz="1300" b="0">
+              <a:rPr sz="1250" b="0">
                 <a:solidFill>
                   <a:srgbClr val="FFFFFF"/>
                 </a:solidFill>
                 <a:latin typeface="Consolas"/>
               </a:rPr>
-              <a:t> |-- Bindings.dat              JSON   Sources[] -&gt; Bindings[] -&gt; Targets[]</a:t>
+              <a:t>                                                   |          |</a:t>
             </a:r>
           </a:p>
           <a:p>
@@ -7306,13 +8888,57 @@
               </a:spcAft>
             </a:pPr>
             <a:r>
-              <a:rPr sz="1300" b="0">
+              <a:rPr sz="1250" b="0">
                 <a:solidFill>
                   <a:srgbClr val="FFFFFF"/>
                 </a:solidFill>
                 <a:latin typeface="Consolas"/>
               </a:rPr>
-              <a:t> +-- Screens\&lt;guid&gt;\Screen.dat JSON   the object tree</a:t>
+              <a:t>   Company standards (naming, colours, layout) ----+          v</a:t>
+            </a:r>
+          </a:p>
+          <a:p>
+            <a:pPr algn="l">
+              <a:lnSpc>
+                <a:spcPct val="115000"/>
+              </a:lnSpc>
+              <a:spcBef>
+                <a:spcPts val="0"/>
+              </a:spcBef>
+              <a:spcAft>
+                <a:spcPts val="200"/>
+              </a:spcAft>
+            </a:pPr>
+            <a:r>
+              <a:rPr sz="1250" b="0">
+                <a:solidFill>
+                  <a:srgbClr val="FFFFFF"/>
+                </a:solidFill>
+                <a:latin typeface="Consolas"/>
+              </a:rPr>
+              <a:t>                                                     LIVE CANVAS + BINDING MAP</a:t>
+            </a:r>
+          </a:p>
+          <a:p>
+            <a:pPr algn="l">
+              <a:lnSpc>
+                <a:spcPct val="115000"/>
+              </a:lnSpc>
+              <a:spcBef>
+                <a:spcPts val="0"/>
+              </a:spcBef>
+              <a:spcAft>
+                <a:spcPts val="200"/>
+              </a:spcAft>
+            </a:pPr>
+            <a:r>
+              <a:rPr sz="1250" b="0">
+                <a:solidFill>
+                  <a:srgbClr val="FFFFFF"/>
+                </a:solidFill>
+                <a:latin typeface="Consolas"/>
+              </a:rPr>
+              <a:t>                                                     (the engineer sees it and steers it)</a:t>
             </a:r>
           </a:p>
         </p:txBody>
@@ -7325,8 +8951,8 @@
         </p:nvSpPr>
         <p:spPr>
           <a:xfrm>
-            <a:off x="685800" y="3794760"/>
-            <a:ext cx="10789920" cy="2194560"/>
+            <a:off x="685800" y="4343400"/>
+            <a:ext cx="10789920" cy="2011680"/>
           </a:xfrm>
           <a:prstGeom prst="rect">
             <a:avLst/>
@@ -7341,7 +8967,7 @@
           <a:p>
             <a:pPr algn="l">
               <a:lnSpc>
-                <a:spcPct val="130000"/>
+                <a:spcPct val="132000"/>
               </a:lnSpc>
               <a:spcBef>
                 <a:spcPts val="0"/>
@@ -7351,13 +8977,13 @@
               </a:spcAft>
             </a:pPr>
             <a:r>
-              <a:rPr sz="1700" b="1">
+              <a:rPr sz="1600" b="1">
                 <a:solidFill>
                   <a:srgbClr val="1A1F26"/>
                 </a:solidFill>
                 <a:latin typeface="Arial"/>
               </a:rPr>
-              <a:t>Plain JSON and plain SQLite. No signature. No encryption. Nothing to defeat.</a:t>
+              <a:t>One file. File ▸ Open Project, and the HMI is there — screens drawn, tags declared, alarms configured, bindings wired. Nothing to import, nothing to assemble.</a:t>
             </a:r>
           </a:p>
           <a:p>
@@ -7369,39 +8995,17 @@
                 <a:spcPts val="0"/>
               </a:spcBef>
               <a:spcAft>
-                <a:spcPts val="1400"/>
-              </a:spcAft>
-            </a:pPr>
-            <a:r>
-              <a:rPr sz="1500" b="0">
-                <a:solidFill>
-                  <a:srgbClr val="5A6673"/>
-                </a:solidFill>
-                <a:latin typeface="Arial"/>
-              </a:rPr>
-              <a:t>So the first thing we did was not design a UI or pick a model. It was to take the product’s own shipped templates apart and find out whether a project could be written from scratch at all.</a:t>
-            </a:r>
-          </a:p>
-          <a:p>
-            <a:pPr algn="l">
-              <a:lnSpc>
-                <a:spcPct val="130000"/>
-              </a:lnSpc>
-              <a:spcBef>
-                <a:spcPts val="0"/>
-              </a:spcBef>
-              <a:spcAft>
                 <a:spcPts val="600"/>
               </a:spcAft>
             </a:pPr>
             <a:r>
-              <a:rPr sz="1700" b="1">
-                <a:solidFill>
-                  <a:srgbClr val="3DCD58"/>
+              <a:rPr sz="1450" b="0">
+                <a:solidFill>
+                  <a:srgbClr val="5A6673"/>
                 </a:solidFill>
                 <a:latin typeface="Arial"/>
               </a:rPr>
-              <a:t>It can. Everything after this follows from that.</a:t>
+              <a:t>The engineer stays in control throughout: the AI proposes, the canvas makes the proposal legible, and a human accepts, edits or redirects. It never deploys anything itself.</a:t>
             </a:r>
           </a:p>
         </p:txBody>
@@ -7508,7 +9112,7 @@
                 </a:solidFill>
                 <a:latin typeface="Arial"/>
               </a:rPr>
-              <a:t>LIVE</a:t>
+              <a:t>03 · THE PROJECT FILE</a:t>
             </a:r>
           </a:p>
         </p:txBody>
@@ -7553,7 +9157,7 @@
                 </a:solidFill>
                 <a:latin typeface="Arial"/>
               </a:rPr>
-              <a:t>One sentence becomes a plant</a:t>
+              <a:t>Why this is possible at all</a:t>
             </a:r>
           </a:p>
         </p:txBody>
@@ -7602,49 +9206,25 @@
           </a:p>
         </p:txBody>
       </p:sp>
-      <p:pic>
-        <p:nvPicPr>
-          <p:cNvPr id="6" name="Picture 5" descr="18-board-all-screens.png"/>
-          <p:cNvPicPr>
-            <a:picLocks noChangeAspect="1"/>
-          </p:cNvPicPr>
-          <p:nvPr/>
-        </p:nvPicPr>
-        <p:blipFill>
-          <a:blip r:embed="rId2"/>
-          <a:stretch>
-            <a:fillRect/>
-          </a:stretch>
-        </p:blipFill>
-        <p:spPr>
-          <a:xfrm>
-            <a:off x="3971239" y="1783080"/>
-            <a:ext cx="7534656" cy="4709160"/>
-          </a:xfrm>
-          <a:prstGeom prst="rect">
-            <a:avLst/>
-          </a:prstGeom>
-        </p:spPr>
-      </p:pic>
-      <p:sp>
-        <p:nvSpPr>
-          <p:cNvPr id="7" name="Rectangle 6"/>
+      <p:sp>
+        <p:nvSpPr>
+          <p:cNvPr id="6" name="Rectangle 5"/>
           <p:cNvSpPr/>
           <p:nvPr/>
         </p:nvSpPr>
         <p:spPr>
           <a:xfrm>
-            <a:off x="3971239" y="1783080"/>
-            <a:ext cx="7534656" cy="4709160"/>
-          </a:xfrm>
-          <a:prstGeom prst="rect">
-            <a:avLst/>
-          </a:prstGeom>
-          <a:noFill/>
-          <a:ln w="12700">
-            <a:solidFill>
-              <a:srgbClr val="D8DEE5"/>
-            </a:solidFill>
+            <a:off x="685800" y="1737360"/>
+            <a:ext cx="10789920" cy="2414016"/>
+          </a:xfrm>
+          <a:prstGeom prst="rect">
+            <a:avLst/>
+          </a:prstGeom>
+          <a:solidFill>
+            <a:srgbClr val="0F1419"/>
+          </a:solidFill>
+          <a:ln>
+            <a:noFill/>
           </a:ln>
           <a:effectLst/>
         </p:spPr>
@@ -7672,58 +9252,14 @@
       </p:sp>
       <p:sp>
         <p:nvSpPr>
-          <p:cNvPr id="8" name="Rectangle 7"/>
-          <p:cNvSpPr/>
-          <p:nvPr/>
-        </p:nvSpPr>
-        <p:spPr>
-          <a:xfrm>
-            <a:off x="685800" y="1828800"/>
-            <a:ext cx="2919679" cy="384048"/>
-          </a:xfrm>
-          <a:prstGeom prst="rect">
-            <a:avLst/>
-          </a:prstGeom>
-          <a:solidFill>
-            <a:srgbClr val="3DCD58"/>
-          </a:solidFill>
-          <a:ln>
-            <a:noFill/>
-          </a:ln>
-          <a:effectLst/>
-        </p:spPr>
-        <p:style>
-          <a:lnRef idx="1">
-            <a:schemeClr val="accent1"/>
-          </a:lnRef>
-          <a:fillRef idx="3">
-            <a:schemeClr val="accent1"/>
-          </a:fillRef>
-          <a:effectRef idx="2">
-            <a:schemeClr val="accent1"/>
-          </a:effectRef>
-          <a:fontRef idx="minor">
-            <a:schemeClr val="lt1"/>
-          </a:fontRef>
-        </p:style>
-        <p:txBody>
-          <a:bodyPr rtlCol="0" anchor="ctr"/>
-          <a:lstStyle/>
-          <a:p>
-            <a:pPr algn="ctr"/>
-          </a:p>
-        </p:txBody>
-      </p:sp>
-      <p:sp>
-        <p:nvSpPr>
-          <p:cNvPr id="9" name="TextBox 8"/>
+          <p:cNvPr id="7" name="TextBox 6"/>
           <p:cNvSpPr txBox="1"/>
           <p:nvPr/>
         </p:nvSpPr>
         <p:spPr>
           <a:xfrm>
-            <a:off x="777240" y="1911096"/>
-            <a:ext cx="2736799" cy="274320"/>
+            <a:off x="941832" y="1920240"/>
+            <a:ext cx="10332720" cy="2139696"/>
           </a:xfrm>
           <a:prstGeom prst="rect">
             <a:avLst/>
@@ -7738,7 +9274,250 @@
           <a:p>
             <a:pPr algn="l">
               <a:lnSpc>
-                <a:spcPct val="125000"/>
+                <a:spcPct val="115000"/>
+              </a:lnSpc>
+              <a:spcBef>
+                <a:spcPts val="0"/>
+              </a:spcBef>
+              <a:spcAft>
+                <a:spcPts val="200"/>
+              </a:spcAft>
+            </a:pPr>
+            <a:r>
+              <a:rPr sz="1250" b="0">
+                <a:solidFill>
+                  <a:srgbClr val="FFFFFF"/>
+                </a:solidFill>
+                <a:latin typeface="Consolas"/>
+              </a:rPr>
+              <a:t>&lt;project&gt;.eote                  ZIP    (nested entries use BACKSLASH separators)</a:t>
+            </a:r>
+          </a:p>
+          <a:p>
+            <a:pPr algn="l">
+              <a:lnSpc>
+                <a:spcPct val="115000"/>
+              </a:lnSpc>
+              <a:spcBef>
+                <a:spcPts val="0"/>
+              </a:spcBef>
+              <a:spcAft>
+                <a:spcPts val="200"/>
+              </a:spcAft>
+            </a:pPr>
+            <a:r>
+              <a:rPr sz="1250" b="0">
+                <a:solidFill>
+                  <a:srgbClr val="FFFFFF"/>
+                </a:solidFill>
+                <a:latin typeface="Consolas"/>
+              </a:rPr>
+              <a:t> |-- Project.dat, Target.dat    JSON   project identity, panel model, resolution</a:t>
+            </a:r>
+          </a:p>
+          <a:p>
+            <a:pPr algn="l">
+              <a:lnSpc>
+                <a:spcPct val="115000"/>
+              </a:lnSpc>
+              <a:spcBef>
+                <a:spcPts val="0"/>
+              </a:spcBef>
+              <a:spcAft>
+                <a:spcPts val="200"/>
+              </a:spcAft>
+            </a:pPr>
+            <a:r>
+              <a:rPr sz="1250" b="0">
+                <a:solidFill>
+                  <a:srgbClr val="FFFFFF"/>
+                </a:solidFill>
+                <a:latin typeface="Consolas"/>
+              </a:rPr>
+              <a:t> |-- Variables.db               SQLite the tags</a:t>
+            </a:r>
+          </a:p>
+          <a:p>
+            <a:pPr algn="l">
+              <a:lnSpc>
+                <a:spcPct val="115000"/>
+              </a:lnSpc>
+              <a:spcBef>
+                <a:spcPts val="0"/>
+              </a:spcBef>
+              <a:spcAft>
+                <a:spcPts val="200"/>
+              </a:spcAft>
+            </a:pPr>
+            <a:r>
+              <a:rPr sz="1250" b="0">
+                <a:solidFill>
+                  <a:srgbClr val="FFFFFF"/>
+                </a:solidFill>
+                <a:latin typeface="Consolas"/>
+              </a:rPr>
+              <a:t> |-- Alarm.db                   SQLite alarm groups and alarms</a:t>
+            </a:r>
+          </a:p>
+          <a:p>
+            <a:pPr algn="l">
+              <a:lnSpc>
+                <a:spcPct val="115000"/>
+              </a:lnSpc>
+              <a:spcBef>
+                <a:spcPts val="0"/>
+              </a:spcBef>
+              <a:spcAft>
+                <a:spcPts val="200"/>
+              </a:spcAft>
+            </a:pPr>
+            <a:r>
+              <a:rPr sz="1250" b="0">
+                <a:solidFill>
+                  <a:srgbClr val="FFFFFF"/>
+                </a:solidFill>
+                <a:latin typeface="Consolas"/>
+              </a:rPr>
+              <a:t> |-- Recipe.db, Security.db ... SQLite other subsystems, passed through untouched</a:t>
+            </a:r>
+          </a:p>
+          <a:p>
+            <a:pPr algn="l">
+              <a:lnSpc>
+                <a:spcPct val="115000"/>
+              </a:lnSpc>
+              <a:spcBef>
+                <a:spcPts val="0"/>
+              </a:spcBef>
+              <a:spcAft>
+                <a:spcPts val="200"/>
+              </a:spcAft>
+            </a:pPr>
+            <a:r>
+              <a:rPr sz="1250" b="0">
+                <a:solidFill>
+                  <a:srgbClr val="FFFFFF"/>
+                </a:solidFill>
+                <a:latin typeface="Consolas"/>
+              </a:rPr>
+              <a:t> |-- Bindings.dat               JSON   Sources[] -&gt; Bindings[] -&gt; Targets[] graph</a:t>
+            </a:r>
+          </a:p>
+          <a:p>
+            <a:pPr algn="l">
+              <a:lnSpc>
+                <a:spcPct val="115000"/>
+              </a:lnSpc>
+              <a:spcBef>
+                <a:spcPts val="0"/>
+              </a:spcBef>
+              <a:spcAft>
+                <a:spcPts val="200"/>
+              </a:spcAft>
+            </a:pPr>
+            <a:r>
+              <a:rPr sz="1250" b="0">
+                <a:solidFill>
+                  <a:srgbClr val="FFFFFF"/>
+                </a:solidFill>
+                <a:latin typeface="Consolas"/>
+              </a:rPr>
+              <a:t> |-- Screens\Hierarchy.dat      JSON   screen order</a:t>
+            </a:r>
+          </a:p>
+          <a:p>
+            <a:pPr algn="l">
+              <a:lnSpc>
+                <a:spcPct val="115000"/>
+              </a:lnSpc>
+              <a:spcBef>
+                <a:spcPts val="0"/>
+              </a:spcBef>
+              <a:spcAft>
+                <a:spcPts val="200"/>
+              </a:spcAft>
+            </a:pPr>
+            <a:r>
+              <a:rPr sz="1250" b="0">
+                <a:solidFill>
+                  <a:srgbClr val="FFFFFF"/>
+                </a:solidFill>
+                <a:latin typeface="Consolas"/>
+              </a:rPr>
+              <a:t> +-- Screens\&lt;guid&gt;\Screen.dat  JSON   the object tree</a:t>
+            </a:r>
+          </a:p>
+        </p:txBody>
+      </p:sp>
+      <p:sp>
+        <p:nvSpPr>
+          <p:cNvPr id="8" name="TextBox 7"/>
+          <p:cNvSpPr txBox="1"/>
+          <p:nvPr/>
+        </p:nvSpPr>
+        <p:spPr>
+          <a:xfrm>
+            <a:off x="685800" y="4251960"/>
+            <a:ext cx="10789920" cy="2194560"/>
+          </a:xfrm>
+          <a:prstGeom prst="rect">
+            <a:avLst/>
+          </a:prstGeom>
+          <a:noFill/>
+        </p:spPr>
+        <p:txBody>
+          <a:bodyPr wrap="square" anchor="t" lIns="0" rIns="0" tIns="0" bIns="0">
+            <a:spAutoFit/>
+          </a:bodyPr>
+          <a:lstStyle/>
+          <a:p>
+            <a:pPr algn="l">
+              <a:lnSpc>
+                <a:spcPct val="130000"/>
+              </a:lnSpc>
+              <a:spcBef>
+                <a:spcPts val="0"/>
+              </a:spcBef>
+              <a:spcAft>
+                <a:spcPts val="1300"/>
+              </a:spcAft>
+            </a:pPr>
+            <a:r>
+              <a:rPr sz="1700" b="1">
+                <a:solidFill>
+                  <a:srgbClr val="1A1F26"/>
+                </a:solidFill>
+                <a:latin typeface="Arial"/>
+              </a:rPr>
+              <a:t>Plain JSON and plain SQLite. No signature. No encryption. Nothing to defeat.</a:t>
+            </a:r>
+          </a:p>
+          <a:p>
+            <a:pPr algn="l">
+              <a:lnSpc>
+                <a:spcPct val="135000"/>
+              </a:lnSpc>
+              <a:spcBef>
+                <a:spcPts val="0"/>
+              </a:spcBef>
+              <a:spcAft>
+                <a:spcPts val="1300"/>
+              </a:spcAft>
+            </a:pPr>
+            <a:r>
+              <a:rPr sz="1450" b="0">
+                <a:solidFill>
+                  <a:srgbClr val="5A6673"/>
+                </a:solidFill>
+                <a:latin typeface="Arial"/>
+              </a:rPr>
+              <a:t>Bindings are declarative — wiring a tag to a display is one JSON object. And the geometry is absolute Location, Width and Height inside a ViewBox, which maps one-to-one onto SVG. That last property is what lets one model drive both the preview and the file.</a:t>
+            </a:r>
+          </a:p>
+          <a:p>
+            <a:pPr algn="l">
+              <a:lnSpc>
+                <a:spcPct val="130000"/>
               </a:lnSpc>
               <a:spcBef>
                 <a:spcPts val="0"/>
@@ -7748,80 +9527,13 @@
               </a:spcAft>
             </a:pPr>
             <a:r>
-              <a:rPr sz="1200" b="1">
-                <a:solidFill>
-                  <a:srgbClr val="FFFFFF"/>
+              <a:rPr sz="1550" b="1">
+                <a:solidFill>
+                  <a:srgbClr val="3DCD58"/>
                 </a:solidFill>
                 <a:latin typeface="Arial"/>
               </a:rPr>
-              <a:t>DEMO · 1</a:t>
-            </a:r>
-          </a:p>
-        </p:txBody>
-      </p:sp>
-      <p:sp>
-        <p:nvSpPr>
-          <p:cNvPr id="10" name="TextBox 9"/>
-          <p:cNvSpPr txBox="1"/>
-          <p:nvPr/>
-        </p:nvSpPr>
-        <p:spPr>
-          <a:xfrm>
-            <a:off x="685800" y="2395728"/>
-            <a:ext cx="2919679" cy="4206240"/>
-          </a:xfrm>
-          <a:prstGeom prst="rect">
-            <a:avLst/>
-          </a:prstGeom>
-          <a:noFill/>
-        </p:spPr>
-        <p:txBody>
-          <a:bodyPr wrap="square" anchor="t" lIns="0" rIns="0" tIns="0" bIns="0">
-            <a:spAutoFit/>
-          </a:bodyPr>
-          <a:lstStyle/>
-          <a:p>
-            <a:pPr algn="l">
-              <a:lnSpc>
-                <a:spcPct val="132000"/>
-              </a:lnSpc>
-              <a:spcBef>
-                <a:spcPts val="0"/>
-              </a:spcBef>
-              <a:spcAft>
-                <a:spcPts val="1300"/>
-              </a:spcAft>
-            </a:pPr>
-            <a:r>
-              <a:rPr sz="1550" b="1">
-                <a:solidFill>
-                  <a:srgbClr val="1A1F26"/>
-                </a:solidFill>
-                <a:latin typeface="Arial"/>
-              </a:rPr>
-              <a:t>Eleven screens, laid out as a board. A plant overview, then a screen per area, with navigation between them.</a:t>
-            </a:r>
-          </a:p>
-          <a:p>
-            <a:pPr algn="l">
-              <a:lnSpc>
-                <a:spcPct val="138000"/>
-              </a:lnSpc>
-              <a:spcBef>
-                <a:spcPts val="0"/>
-              </a:spcBef>
-              <a:spcAft>
-                <a:spcPts val="600"/>
-              </a:spcAft>
-            </a:pPr>
-            <a:r>
-              <a:rPr sz="1300" b="0">
-                <a:solidFill>
-                  <a:srgbClr val="5A6673"/>
-                </a:solidFill>
-                <a:latin typeface="Arial"/>
-              </a:rPr>
-              <a:t>A 1,248-tag plant is not one screen — it is a screen hierarchy, and inferring that hierarchy from tag names is the real problem. Every unit gets a screen. A chiller is not an air compressor.</a:t>
+              <a:t>So the first thing we did was not design a UI. It was to prove a project could be written from scratch.</a:t>
             </a:r>
           </a:p>
         </p:txBody>
@@ -7928,7 +9640,7 @@
                 </a:solidFill>
                 <a:latin typeface="Arial"/>
               </a:rPr>
-              <a:t>LIVE</a:t>
+              <a:t>04 · SYSTEM ARCHITECTURE</a:t>
             </a:r>
           </a:p>
         </p:txBody>
@@ -7973,7 +9685,7 @@
                 </a:solidFill>
                 <a:latin typeface="Arial"/>
               </a:rPr>
-              <a:t>You watch it work, in engineering language</a:t>
+              <a:t>Eight stages, one streaming contract</a:t>
             </a:r>
           </a:p>
         </p:txBody>
@@ -8022,49 +9734,25 @@
           </a:p>
         </p:txBody>
       </p:sp>
-      <p:pic>
-        <p:nvPicPr>
-          <p:cNvPr id="6" name="Picture 5" descr="17-generation-running.png"/>
-          <p:cNvPicPr>
-            <a:picLocks noChangeAspect="1"/>
-          </p:cNvPicPr>
-          <p:nvPr/>
-        </p:nvPicPr>
-        <p:blipFill>
-          <a:blip r:embed="rId2"/>
-          <a:stretch>
-            <a:fillRect/>
-          </a:stretch>
-        </p:blipFill>
-        <p:spPr>
-          <a:xfrm>
-            <a:off x="3971239" y="1783080"/>
-            <a:ext cx="7534656" cy="4709160"/>
-          </a:xfrm>
-          <a:prstGeom prst="rect">
-            <a:avLst/>
-          </a:prstGeom>
-        </p:spPr>
-      </p:pic>
-      <p:sp>
-        <p:nvSpPr>
-          <p:cNvPr id="7" name="Rectangle 6"/>
+      <p:sp>
+        <p:nvSpPr>
+          <p:cNvPr id="6" name="Rectangle 5"/>
           <p:cNvSpPr/>
           <p:nvPr/>
         </p:nvSpPr>
         <p:spPr>
           <a:xfrm>
-            <a:off x="3971239" y="1783080"/>
-            <a:ext cx="7534656" cy="4709160"/>
-          </a:xfrm>
-          <a:prstGeom prst="rect">
-            <a:avLst/>
-          </a:prstGeom>
-          <a:noFill/>
-          <a:ln w="12700">
-            <a:solidFill>
-              <a:srgbClr val="D8DEE5"/>
-            </a:solidFill>
+            <a:off x="685800" y="1719072"/>
+            <a:ext cx="10789920" cy="4718304"/>
+          </a:xfrm>
+          <a:prstGeom prst="rect">
+            <a:avLst/>
+          </a:prstGeom>
+          <a:solidFill>
+            <a:srgbClr val="0F1419"/>
+          </a:solidFill>
+          <a:ln>
+            <a:noFill/>
           </a:ln>
           <a:effectLst/>
         </p:spPr>
@@ -8092,58 +9780,14 @@
       </p:sp>
       <p:sp>
         <p:nvSpPr>
-          <p:cNvPr id="8" name="Rectangle 7"/>
-          <p:cNvSpPr/>
-          <p:nvPr/>
-        </p:nvSpPr>
-        <p:spPr>
-          <a:xfrm>
-            <a:off x="685800" y="1828800"/>
-            <a:ext cx="2919679" cy="384048"/>
-          </a:xfrm>
-          <a:prstGeom prst="rect">
-            <a:avLst/>
-          </a:prstGeom>
-          <a:solidFill>
-            <a:srgbClr val="3DCD58"/>
-          </a:solidFill>
-          <a:ln>
-            <a:noFill/>
-          </a:ln>
-          <a:effectLst/>
-        </p:spPr>
-        <p:style>
-          <a:lnRef idx="1">
-            <a:schemeClr val="accent1"/>
-          </a:lnRef>
-          <a:fillRef idx="3">
-            <a:schemeClr val="accent1"/>
-          </a:fillRef>
-          <a:effectRef idx="2">
-            <a:schemeClr val="accent1"/>
-          </a:effectRef>
-          <a:fontRef idx="minor">
-            <a:schemeClr val="lt1"/>
-          </a:fontRef>
-        </p:style>
-        <p:txBody>
-          <a:bodyPr rtlCol="0" anchor="ctr"/>
-          <a:lstStyle/>
-          <a:p>
-            <a:pPr algn="ctr"/>
-          </a:p>
-        </p:txBody>
-      </p:sp>
-      <p:sp>
-        <p:nvSpPr>
-          <p:cNvPr id="9" name="TextBox 8"/>
+          <p:cNvPr id="7" name="TextBox 6"/>
           <p:cNvSpPr txBox="1"/>
           <p:nvPr/>
         </p:nvSpPr>
         <p:spPr>
           <a:xfrm>
-            <a:off x="777240" y="1911096"/>
-            <a:ext cx="2736799" cy="274320"/>
+            <a:off x="941832" y="1901952"/>
+            <a:ext cx="10332720" cy="4443984"/>
           </a:xfrm>
           <a:prstGeom prst="rect">
             <a:avLst/>
@@ -8158,7 +9802,426 @@
           <a:p>
             <a:pPr algn="l">
               <a:lnSpc>
-                <a:spcPct val="125000"/>
+                <a:spcPct val="115000"/>
+              </a:lnSpc>
+              <a:spcBef>
+                <a:spcPts val="0"/>
+              </a:spcBef>
+              <a:spcAft>
+                <a:spcPts val="200"/>
+              </a:spcAft>
+            </a:pPr>
+            <a:r>
+              <a:rPr sz="1050" b="0">
+                <a:solidFill>
+                  <a:srgbClr val="FFFFFF"/>
+                </a:solidFill>
+                <a:latin typeface="Consolas"/>
+              </a:rPr>
+              <a:t>+---------------------------------------------------------------------------+</a:t>
+            </a:r>
+          </a:p>
+          <a:p>
+            <a:pPr algn="l">
+              <a:lnSpc>
+                <a:spcPct val="115000"/>
+              </a:lnSpc>
+              <a:spcBef>
+                <a:spcPts val="0"/>
+              </a:spcBef>
+              <a:spcAft>
+                <a:spcPts val="200"/>
+              </a:spcAft>
+            </a:pPr>
+            <a:r>
+              <a:rPr sz="1050" b="0">
+                <a:solidFill>
+                  <a:srgbClr val="FFFFFF"/>
+                </a:solidFill>
+                <a:latin typeface="Consolas"/>
+              </a:rPr>
+              <a:t>|  WEB CLIENT   Conversation . Live HMI canvas . Binding map . Validation    |</a:t>
+            </a:r>
+          </a:p>
+          <a:p>
+            <a:pPr algn="l">
+              <a:lnSpc>
+                <a:spcPct val="115000"/>
+              </a:lnSpc>
+              <a:spcBef>
+                <a:spcPts val="0"/>
+              </a:spcBef>
+              <a:spcAft>
+                <a:spcPts val="200"/>
+              </a:spcAft>
+            </a:pPr>
+            <a:r>
+              <a:rPr sz="1050" b="0">
+                <a:solidFill>
+                  <a:srgbClr val="FFFFFF"/>
+                </a:solidFill>
+                <a:latin typeface="Consolas"/>
+              </a:rPr>
+              <a:t>+-------------------------------+-------------------------------------------+</a:t>
+            </a:r>
+          </a:p>
+          <a:p>
+            <a:pPr algn="l">
+              <a:lnSpc>
+                <a:spcPct val="115000"/>
+              </a:lnSpc>
+              <a:spcBef>
+                <a:spcPts val="0"/>
+              </a:spcBef>
+              <a:spcAft>
+                <a:spcPts val="200"/>
+              </a:spcAft>
+            </a:pPr>
+            <a:r>
+              <a:rPr sz="1050" b="0">
+                <a:solidFill>
+                  <a:srgbClr val="FFFFFF"/>
+                </a:solidFill>
+                <a:latin typeface="Consolas"/>
+              </a:rPr>
+              <a:t>                                |   SSE - one finished object at a time</a:t>
+            </a:r>
+          </a:p>
+          <a:p>
+            <a:pPr algn="l">
+              <a:lnSpc>
+                <a:spcPct val="115000"/>
+              </a:lnSpc>
+              <a:spcBef>
+                <a:spcPts val="0"/>
+              </a:spcBef>
+              <a:spcAft>
+                <a:spcPts val="200"/>
+              </a:spcAft>
+            </a:pPr>
+            <a:r>
+              <a:rPr sz="1050" b="0">
+                <a:solidFill>
+                  <a:srgbClr val="FFFFFF"/>
+                </a:solidFill>
+                <a:latin typeface="Consolas"/>
+              </a:rPr>
+              <a:t>+-------------------------------v-------------------------------------------+</a:t>
+            </a:r>
+          </a:p>
+          <a:p>
+            <a:pPr algn="l">
+              <a:lnSpc>
+                <a:spcPct val="115000"/>
+              </a:lnSpc>
+              <a:spcBef>
+                <a:spcPts val="0"/>
+              </a:spcBef>
+              <a:spcAft>
+                <a:spcPts val="200"/>
+              </a:spcAft>
+            </a:pPr>
+            <a:r>
+              <a:rPr sz="1050" b="0">
+                <a:solidFill>
+                  <a:srgbClr val="FFFFFF"/>
+                </a:solidFill>
+                <a:latin typeface="Consolas"/>
+              </a:rPr>
+              <a:t>|  ORCHESTRATOR                                                             |</a:t>
+            </a:r>
+          </a:p>
+          <a:p>
+            <a:pPr algn="l">
+              <a:lnSpc>
+                <a:spcPct val="115000"/>
+              </a:lnSpc>
+              <a:spcBef>
+                <a:spcPts val="0"/>
+              </a:spcBef>
+              <a:spcAft>
+                <a:spcPts val="200"/>
+              </a:spcAft>
+            </a:pPr>
+            <a:r>
+              <a:rPr sz="1050" b="0">
+                <a:solidFill>
+                  <a:srgbClr val="FFFFFF"/>
+                </a:solidFill>
+                <a:latin typeface="Consolas"/>
+              </a:rPr>
+              <a:t>|    Tag Ingestion --&gt; Equipment Inference --&gt; Layout Planner               |</a:t>
+            </a:r>
+          </a:p>
+          <a:p>
+            <a:pPr algn="l">
+              <a:lnSpc>
+                <a:spcPct val="115000"/>
+              </a:lnSpc>
+              <a:spcBef>
+                <a:spcPts val="0"/>
+              </a:spcBef>
+              <a:spcAft>
+                <a:spcPts val="200"/>
+              </a:spcAft>
+            </a:pPr>
+            <a:r>
+              <a:rPr sz="1050" b="0">
+                <a:solidFill>
+                  <a:srgbClr val="FFFFFF"/>
+                </a:solidFill>
+                <a:latin typeface="Consolas"/>
+              </a:rPr>
+              <a:t>|          |                   |                     |                      |</a:t>
+            </a:r>
+          </a:p>
+          <a:p>
+            <a:pPr algn="l">
+              <a:lnSpc>
+                <a:spcPct val="115000"/>
+              </a:lnSpc>
+              <a:spcBef>
+                <a:spcPts val="0"/>
+              </a:spcBef>
+              <a:spcAft>
+                <a:spcPts val="200"/>
+              </a:spcAft>
+            </a:pPr>
+            <a:r>
+              <a:rPr sz="1050" b="0">
+                <a:solidFill>
+                  <a:srgbClr val="FFFFFF"/>
+                </a:solidFill>
+                <a:latin typeface="Consolas"/>
+              </a:rPr>
+              <a:t>|          |                   v                     v                      |</a:t>
+            </a:r>
+          </a:p>
+          <a:p>
+            <a:pPr algn="l">
+              <a:lnSpc>
+                <a:spcPct val="115000"/>
+              </a:lnSpc>
+              <a:spcBef>
+                <a:spcPts val="0"/>
+              </a:spcBef>
+              <a:spcAft>
+                <a:spcPts val="200"/>
+              </a:spcAft>
+            </a:pPr>
+            <a:r>
+              <a:rPr sz="1050" b="0">
+                <a:solidFill>
+                  <a:srgbClr val="FFFFFF"/>
+                </a:solidFill>
+                <a:latin typeface="Consolas"/>
+              </a:rPr>
+              <a:t>|          |            Part Selector -------&gt; Screen Generator             |</a:t>
+            </a:r>
+          </a:p>
+          <a:p>
+            <a:pPr algn="l">
+              <a:lnSpc>
+                <a:spcPct val="115000"/>
+              </a:lnSpc>
+              <a:spcBef>
+                <a:spcPts val="0"/>
+              </a:spcBef>
+              <a:spcAft>
+                <a:spcPts val="200"/>
+              </a:spcAft>
+            </a:pPr>
+            <a:r>
+              <a:rPr sz="1050" b="0">
+                <a:solidFill>
+                  <a:srgbClr val="FFFFFF"/>
+                </a:solidFill>
+                <a:latin typeface="Consolas"/>
+              </a:rPr>
+              <a:t>|          |        (50 real part shapes)    (schema-grounded JSON)         |</a:t>
+            </a:r>
+          </a:p>
+          <a:p>
+            <a:pPr algn="l">
+              <a:lnSpc>
+                <a:spcPct val="115000"/>
+              </a:lnSpc>
+              <a:spcBef>
+                <a:spcPts val="0"/>
+              </a:spcBef>
+              <a:spcAft>
+                <a:spcPts val="200"/>
+              </a:spcAft>
+            </a:pPr>
+            <a:r>
+              <a:rPr sz="1050" b="0">
+                <a:solidFill>
+                  <a:srgbClr val="FFFFFF"/>
+                </a:solidFill>
+                <a:latin typeface="Consolas"/>
+              </a:rPr>
+              <a:t>|          +------------&gt; Binding Resolver &lt;--------+                       |</a:t>
+            </a:r>
+          </a:p>
+          <a:p>
+            <a:pPr algn="l">
+              <a:lnSpc>
+                <a:spcPct val="115000"/>
+              </a:lnSpc>
+              <a:spcBef>
+                <a:spcPts val="0"/>
+              </a:spcBef>
+              <a:spcAft>
+                <a:spcPts val="200"/>
+              </a:spcAft>
+            </a:pPr>
+            <a:r>
+              <a:rPr sz="1050" b="0">
+                <a:solidFill>
+                  <a:srgbClr val="FFFFFF"/>
+                </a:solidFill>
+                <a:latin typeface="Consolas"/>
+              </a:rPr>
+              <a:t>|                               |                                           |</a:t>
+            </a:r>
+          </a:p>
+          <a:p>
+            <a:pPr algn="l">
+              <a:lnSpc>
+                <a:spcPct val="115000"/>
+              </a:lnSpc>
+              <a:spcBef>
+                <a:spcPts val="0"/>
+              </a:spcBef>
+              <a:spcAft>
+                <a:spcPts val="200"/>
+              </a:spcAft>
+            </a:pPr>
+            <a:r>
+              <a:rPr sz="1050" b="0">
+                <a:solidFill>
+                  <a:srgbClr val="FFFFFF"/>
+                </a:solidFill>
+                <a:latin typeface="Consolas"/>
+              </a:rPr>
+              <a:t>|                    Validation Engine --&gt; Project Packager                 |</a:t>
+            </a:r>
+          </a:p>
+          <a:p>
+            <a:pPr algn="l">
+              <a:lnSpc>
+                <a:spcPct val="115000"/>
+              </a:lnSpc>
+              <a:spcBef>
+                <a:spcPts val="0"/>
+              </a:spcBef>
+              <a:spcAft>
+                <a:spcPts val="200"/>
+              </a:spcAft>
+            </a:pPr>
+            <a:r>
+              <a:rPr sz="1050" b="0">
+                <a:solidFill>
+                  <a:srgbClr val="FFFFFF"/>
+                </a:solidFill>
+                <a:latin typeface="Consolas"/>
+              </a:rPr>
+              <a:t>|                          (7 rules)     (.eote: screens, Variables.db,     |</a:t>
+            </a:r>
+          </a:p>
+          <a:p>
+            <a:pPr algn="l">
+              <a:lnSpc>
+                <a:spcPct val="115000"/>
+              </a:lnSpc>
+              <a:spcBef>
+                <a:spcPts val="0"/>
+              </a:spcBef>
+              <a:spcAft>
+                <a:spcPts val="200"/>
+              </a:spcAft>
+            </a:pPr>
+            <a:r>
+              <a:rPr sz="1050" b="0">
+                <a:solidFill>
+                  <a:srgbClr val="FFFFFF"/>
+                </a:solidFill>
+                <a:latin typeface="Consolas"/>
+              </a:rPr>
+              <a:t>|                                         Alarm.db, Bindings.dat)           |</a:t>
+            </a:r>
+          </a:p>
+          <a:p>
+            <a:pPr algn="l">
+              <a:lnSpc>
+                <a:spcPct val="115000"/>
+              </a:lnSpc>
+              <a:spcBef>
+                <a:spcPts val="0"/>
+              </a:spcBef>
+              <a:spcAft>
+                <a:spcPts val="200"/>
+              </a:spcAft>
+            </a:pPr>
+            <a:r>
+              <a:rPr sz="1050" b="0">
+                <a:solidFill>
+                  <a:srgbClr val="FFFFFF"/>
+                </a:solidFill>
+                <a:latin typeface="Consolas"/>
+              </a:rPr>
+              <a:t>+---------------------------------------------------------------------------+</a:t>
+            </a:r>
+          </a:p>
+        </p:txBody>
+      </p:sp>
+      <p:sp>
+        <p:nvSpPr>
+          <p:cNvPr id="8" name="TextBox 7"/>
+          <p:cNvSpPr txBox="1"/>
+          <p:nvPr/>
+        </p:nvSpPr>
+        <p:spPr>
+          <a:xfrm>
+            <a:off x="685800" y="5230368"/>
+            <a:ext cx="10789920" cy="1371600"/>
+          </a:xfrm>
+          <a:prstGeom prst="rect">
+            <a:avLst/>
+          </a:prstGeom>
+          <a:noFill/>
+        </p:spPr>
+        <p:txBody>
+          <a:bodyPr wrap="square" anchor="t" lIns="0" rIns="0" tIns="0" bIns="0">
+            <a:spAutoFit/>
+          </a:bodyPr>
+          <a:lstStyle/>
+          <a:p>
+            <a:pPr algn="l">
+              <a:lnSpc>
+                <a:spcPct val="128000"/>
+              </a:lnSpc>
+              <a:spcBef>
+                <a:spcPts val="0"/>
+              </a:spcBef>
+              <a:spcAft>
+                <a:spcPts val="900"/>
+              </a:spcAft>
+            </a:pPr>
+            <a:r>
+              <a:rPr sz="1800" b="1">
+                <a:solidFill>
+                  <a:srgbClr val="3DCD58"/>
+                </a:solidFill>
+                <a:latin typeface="Arial"/>
+              </a:rPr>
+              <a:t>One model, two renderers — so the preview cannot lie.</a:t>
+            </a:r>
+          </a:p>
+          <a:p>
+            <a:pPr algn="l">
+              <a:lnSpc>
+                <a:spcPct val="133000"/>
               </a:lnSpc>
               <a:spcBef>
                 <a:spcPts val="0"/>
@@ -8168,80 +10231,13 @@
               </a:spcAft>
             </a:pPr>
             <a:r>
-              <a:rPr sz="1200" b="1">
-                <a:solidFill>
-                  <a:srgbClr val="FFFFFF"/>
+              <a:rPr sz="1400" b="0">
+                <a:solidFill>
+                  <a:srgbClr val="5A6673"/>
                 </a:solidFill>
                 <a:latin typeface="Arial"/>
               </a:rPr>
-              <a:t>DEMO · 2</a:t>
-            </a:r>
-          </a:p>
-        </p:txBody>
-      </p:sp>
-      <p:sp>
-        <p:nvSpPr>
-          <p:cNvPr id="10" name="TextBox 9"/>
-          <p:cNvSpPr txBox="1"/>
-          <p:nvPr/>
-        </p:nvSpPr>
-        <p:spPr>
-          <a:xfrm>
-            <a:off x="685800" y="2395728"/>
-            <a:ext cx="2919679" cy="4206240"/>
-          </a:xfrm>
-          <a:prstGeom prst="rect">
-            <a:avLst/>
-          </a:prstGeom>
-          <a:noFill/>
-        </p:spPr>
-        <p:txBody>
-          <a:bodyPr wrap="square" anchor="t" lIns="0" rIns="0" tIns="0" bIns="0">
-            <a:spAutoFit/>
-          </a:bodyPr>
-          <a:lstStyle/>
-          <a:p>
-            <a:pPr algn="l">
-              <a:lnSpc>
-                <a:spcPct val="132000"/>
-              </a:lnSpc>
-              <a:spcBef>
-                <a:spcPts val="0"/>
-              </a:spcBef>
-              <a:spcAft>
-                <a:spcPts val="1300"/>
-              </a:spcAft>
-            </a:pPr>
-            <a:r>
-              <a:rPr sz="1550" b="1">
-                <a:solidFill>
-                  <a:srgbClr val="1A1F26"/>
-                </a:solidFill>
-                <a:latin typeface="Arial"/>
-              </a:rPr>
-              <a:t>Eight steps, each reporting what it produced, each clickable to select the objects it created.</a:t>
-            </a:r>
-          </a:p>
-          <a:p>
-            <a:pPr algn="l">
-              <a:lnSpc>
-                <a:spcPct val="138000"/>
-              </a:lnSpc>
-              <a:spcBef>
-                <a:spcPts val="0"/>
-              </a:spcBef>
-              <a:spcAft>
-                <a:spcPts val="600"/>
-              </a:spcAft>
-            </a:pPr>
-            <a:r>
-              <a:rPr sz="1300" b="0">
-                <a:solidFill>
-                  <a:srgbClr val="5A6673"/>
-                </a:solidFill>
-                <a:latin typeface="Arial"/>
-              </a:rPr>
-              <a:t>Not “Thinking…”. Parse PLC tags → 1,248. Infer equipment → pumps, instruments, motors. Configure alarms → 232. An engineer will not accept a screen they did not see being built.</a:t>
+              <a:t>The same Screen.dat JSON drives the SVG canvas and the packager. There is no second model of the screen to drift from the first, and the compiler enforces it: the canvas switches exhaustively over the part union, so it cannot draw a part the packager cannot write.</a:t>
             </a:r>
           </a:p>
         </p:txBody>
@@ -8348,7 +10344,7 @@
                 </a:solidFill>
                 <a:latin typeface="Arial"/>
               </a:rPr>
-              <a:t>LIVE</a:t>
+              <a:t>05 · DEMO</a:t>
             </a:r>
           </a:p>
         </p:txBody>
@@ -8393,7 +10389,7 @@
                 </a:solidFill>
                 <a:latin typeface="Arial"/>
               </a:rPr>
-              <a:t>Every tag, wired and visible</a:t>
+              <a:t>One sentence becomes a plant</a:t>
             </a:r>
           </a:p>
         </p:txBody>
@@ -8444,7 +10440,7 @@
       </p:sp>
       <p:pic>
         <p:nvPicPr>
-          <p:cNvPr id="6" name="Picture 5" descr="04-bindings.png"/>
+          <p:cNvPr id="6" name="Picture 5" descr="18-board-all-screens.png"/>
           <p:cNvPicPr>
             <a:picLocks noChangeAspect="1"/>
           </p:cNvPicPr>
@@ -8594,7 +10590,7 @@
                 </a:solidFill>
                 <a:latin typeface="Arial"/>
               </a:rPr>
-              <a:t>DEMO · 3</a:t>
+              <a:t>DEMO · 1  ·  THE RESULT</a:t>
             </a:r>
           </a:p>
         </p:txBody>
@@ -8639,7 +10635,7 @@
                 </a:solidFill>
                 <a:latin typeface="Arial"/>
               </a:rPr>
-              <a:t>The binding map, drawn from the real Sources / Targets graph the .eote contains.</a:t>
+              <a:t>Eleven screens on a board. An overview, then a screen per area, with navigation between them.</a:t>
             </a:r>
           </a:p>
           <a:p>
@@ -8661,7 +10657,7 @@
                 </a:solidFill>
                 <a:latin typeface="Arial"/>
               </a:rPr>
-              <a:t>This is the pain point the brief names, and today it is invisible until commissioning. Here it is a picture you can check before you export.</a:t>
+              <a:t>A 1,248-tag plant is not one screen — it is a hierarchy, and inferring that hierarchy from tag names is the actual problem. Every unit gets a screen.</a:t>
             </a:r>
           </a:p>
         </p:txBody>
@@ -8768,7 +10764,7 @@
                 </a:solidFill>
                 <a:latin typeface="Arial"/>
               </a:rPr>
-              <a:t>LIVE</a:t>
+              <a:t>05 · DEMO</a:t>
             </a:r>
           </a:p>
         </p:txBody>
@@ -8813,7 +10809,7 @@
                 </a:solidFill>
                 <a:latin typeface="Arial"/>
               </a:rPr>
-              <a:t>Behaviour, before any hardware exists</a:t>
+              <a:t>You watch it work, in engineering language</a:t>
             </a:r>
           </a:p>
         </p:txBody>
@@ -8864,7 +10860,7 @@
       </p:sp>
       <p:pic>
         <p:nvPicPr>
-          <p:cNvPr id="6" name="Picture 5" descr="06-simulation-live.png"/>
+          <p:cNvPr id="6" name="Picture 5" descr="17-generation-running.png"/>
           <p:cNvPicPr>
             <a:picLocks noChangeAspect="1"/>
           </p:cNvPicPr>
@@ -9014,7 +11010,7 @@
                 </a:solidFill>
                 <a:latin typeface="Arial"/>
               </a:rPr>
-              <a:t>DEMO · 4</a:t>
+              <a:t>DEMO · 2  ·  THE PIPELINE, RUNNING</a:t>
             </a:r>
           </a:p>
         </p:txBody>
@@ -9059,7 +11055,7 @@
                 </a:solidFill>
                 <a:latin typeface="Arial"/>
               </a:rPr>
-              <a:t>Press Simulate and a process model drives the screen: lamps change state, numbers move, alarms raise.</a:t>
+              <a:t>Eight steps, each reporting what it produced, each clickable to select the objects it created.</a:t>
             </a:r>
           </a:p>
           <a:p>
@@ -9081,7 +11077,7 @@
                 </a:solidFill>
                 <a:latin typeface="Arial"/>
               </a:rPr>
-              <a:t>Numerics are driven through their own alarm setpoints, so every alarm the project defines actually fires. Lead and standby pumps behave differently.</a:t>
+              <a:t>Not “Thinking…”. Parsed 1,248 tags. Inferred pumps, instruments, motors. Configured 232 alarms. An engineer will not accept a screen they did not see being built.</a:t>
             </a:r>
           </a:p>
         </p:txBody>
@@ -9188,7 +11184,7 @@
                 </a:solidFill>
                 <a:latin typeface="Arial"/>
               </a:rPr>
-              <a:t>WHY YOU CAN TRUST IT</a:t>
+              <a:t>05 · DEMO</a:t>
             </a:r>
           </a:p>
         </p:txBody>
@@ -9233,7 +11229,7 @@
                 </a:solidFill>
                 <a:latin typeface="Arial"/>
               </a:rPr>
-              <a:t>One model, two renderers — the preview cannot lie</a:t>
+              <a:t>Every tag, wired and visible</a:t>
             </a:r>
           </a:p>
         </p:txBody>
@@ -9282,22 +11278,90 @@
           </a:p>
         </p:txBody>
       </p:sp>
-      <p:sp>
-        <p:nvSpPr>
-          <p:cNvPr id="6" name="Rectangle 5"/>
+      <p:pic>
+        <p:nvPicPr>
+          <p:cNvPr id="6" name="Picture 5" descr="04-bindings.png"/>
+          <p:cNvPicPr>
+            <a:picLocks noChangeAspect="1"/>
+          </p:cNvPicPr>
+          <p:nvPr/>
+        </p:nvPicPr>
+        <p:blipFill>
+          <a:blip r:embed="rId2"/>
+          <a:stretch>
+            <a:fillRect/>
+          </a:stretch>
+        </p:blipFill>
+        <p:spPr>
+          <a:xfrm>
+            <a:off x="3971239" y="1783080"/>
+            <a:ext cx="7534656" cy="4709160"/>
+          </a:xfrm>
+          <a:prstGeom prst="rect">
+            <a:avLst/>
+          </a:prstGeom>
+        </p:spPr>
+      </p:pic>
+      <p:sp>
+        <p:nvSpPr>
+          <p:cNvPr id="7" name="Rectangle 6"/>
           <p:cNvSpPr/>
           <p:nvPr/>
         </p:nvSpPr>
         <p:spPr>
           <a:xfrm>
-            <a:off x="685800" y="1783080"/>
-            <a:ext cx="10789920" cy="1901952"/>
+            <a:off x="3971239" y="1783080"/>
+            <a:ext cx="7534656" cy="4709160"/>
+          </a:xfrm>
+          <a:prstGeom prst="rect">
+            <a:avLst/>
+          </a:prstGeom>
+          <a:noFill/>
+          <a:ln w="12700">
+            <a:solidFill>
+              <a:srgbClr val="D8DEE5"/>
+            </a:solidFill>
+          </a:ln>
+          <a:effectLst/>
+        </p:spPr>
+        <p:style>
+          <a:lnRef idx="1">
+            <a:schemeClr val="accent1"/>
+          </a:lnRef>
+          <a:fillRef idx="3">
+            <a:schemeClr val="accent1"/>
+          </a:fillRef>
+          <a:effectRef idx="2">
+            <a:schemeClr val="accent1"/>
+          </a:effectRef>
+          <a:fontRef idx="minor">
+            <a:schemeClr val="lt1"/>
+          </a:fontRef>
+        </p:style>
+        <p:txBody>
+          <a:bodyPr rtlCol="0" anchor="ctr"/>
+          <a:lstStyle/>
+          <a:p>
+            <a:pPr algn="ctr"/>
+          </a:p>
+        </p:txBody>
+      </p:sp>
+      <p:sp>
+        <p:nvSpPr>
+          <p:cNvPr id="8" name="Rectangle 7"/>
+          <p:cNvSpPr/>
+          <p:nvPr/>
+        </p:nvSpPr>
+        <p:spPr>
+          <a:xfrm>
+            <a:off x="685800" y="1828800"/>
+            <a:ext cx="2919679" cy="384048"/>
           </a:xfrm>
           <a:prstGeom prst="rect">
             <a:avLst/>
           </a:prstGeom>
           <a:solidFill>
-            <a:srgbClr val="0F1419"/>
+            <a:srgbClr val="3DCD58"/>
           </a:solidFill>
           <a:ln>
             <a:noFill/>
@@ -9328,14 +11392,14 @@
       </p:sp>
       <p:sp>
         <p:nvSpPr>
-          <p:cNvPr id="7" name="TextBox 6"/>
+          <p:cNvPr id="9" name="TextBox 8"/>
           <p:cNvSpPr txBox="1"/>
           <p:nvPr/>
         </p:nvSpPr>
         <p:spPr>
           <a:xfrm>
-            <a:off x="941832" y="1965960"/>
-            <a:ext cx="10332720" cy="1627632"/>
+            <a:off x="777240" y="1911096"/>
+            <a:ext cx="2736799" cy="274320"/>
           </a:xfrm>
           <a:prstGeom prst="rect">
             <a:avLst/>
@@ -9350,147 +11414,37 @@
           <a:p>
             <a:pPr algn="l">
               <a:lnSpc>
-                <a:spcPct val="115000"/>
+                <a:spcPct val="125000"/>
               </a:lnSpc>
               <a:spcBef>
                 <a:spcPts val="0"/>
               </a:spcBef>
               <a:spcAft>
-                <a:spcPts val="200"/>
+                <a:spcPts val="600"/>
               </a:spcAft>
             </a:pPr>
             <a:r>
-              <a:rPr sz="1300" b="0">
+              <a:rPr sz="1200" b="1">
                 <a:solidFill>
                   <a:srgbClr val="FFFFFF"/>
                 </a:solidFill>
-                <a:latin typeface="Consolas"/>
+                <a:latin typeface="Arial"/>
               </a:rPr>
-              <a:t>                       Screen.dat  (one JSON object tree)</a:t>
-            </a:r>
-          </a:p>
-          <a:p>
-            <a:pPr algn="l">
-              <a:lnSpc>
-                <a:spcPct val="115000"/>
-              </a:lnSpc>
-              <a:spcBef>
-                <a:spcPts val="0"/>
-              </a:spcBef>
-              <a:spcAft>
-                <a:spcPts val="200"/>
-              </a:spcAft>
-            </a:pPr>
-            <a:r>
-              <a:rPr sz="1300" b="0">
-                <a:solidFill>
-                  <a:srgbClr val="FFFFFF"/>
-                </a:solidFill>
-                <a:latin typeface="Consolas"/>
-              </a:rPr>
-              <a:t>                              |</a:t>
-            </a:r>
-          </a:p>
-          <a:p>
-            <a:pPr algn="l">
-              <a:lnSpc>
-                <a:spcPct val="115000"/>
-              </a:lnSpc>
-              <a:spcBef>
-                <a:spcPts val="0"/>
-              </a:spcBef>
-              <a:spcAft>
-                <a:spcPts val="200"/>
-              </a:spcAft>
-            </a:pPr>
-            <a:r>
-              <a:rPr sz="1300" b="0">
-                <a:solidFill>
-                  <a:srgbClr val="FFFFFF"/>
-                </a:solidFill>
-                <a:latin typeface="Consolas"/>
-              </a:rPr>
-              <a:t>               +--------------+--------------+</a:t>
-            </a:r>
-          </a:p>
-          <a:p>
-            <a:pPr algn="l">
-              <a:lnSpc>
-                <a:spcPct val="115000"/>
-              </a:lnSpc>
-              <a:spcBef>
-                <a:spcPts val="0"/>
-              </a:spcBef>
-              <a:spcAft>
-                <a:spcPts val="200"/>
-              </a:spcAft>
-            </a:pPr>
-            <a:r>
-              <a:rPr sz="1300" b="0">
-                <a:solidFill>
-                  <a:srgbClr val="FFFFFF"/>
-                </a:solidFill>
-                <a:latin typeface="Consolas"/>
-              </a:rPr>
-              <a:t>               v                             v</a:t>
-            </a:r>
-          </a:p>
-          <a:p>
-            <a:pPr algn="l">
-              <a:lnSpc>
-                <a:spcPct val="115000"/>
-              </a:lnSpc>
-              <a:spcBef>
-                <a:spcPts val="0"/>
-              </a:spcBef>
-              <a:spcAft>
-                <a:spcPts val="200"/>
-              </a:spcAft>
-            </a:pPr>
-            <a:r>
-              <a:rPr sz="1300" b="0">
-                <a:solidFill>
-                  <a:srgbClr val="FFFFFF"/>
-                </a:solidFill>
-                <a:latin typeface="Consolas"/>
-              </a:rPr>
-              <a:t>        SVG in the browser            .eote packager</a:t>
-            </a:r>
-          </a:p>
-          <a:p>
-            <a:pPr algn="l">
-              <a:lnSpc>
-                <a:spcPct val="115000"/>
-              </a:lnSpc>
-              <a:spcBef>
-                <a:spcPts val="0"/>
-              </a:spcBef>
-              <a:spcAft>
-                <a:spcPts val="200"/>
-              </a:spcAft>
-            </a:pPr>
-            <a:r>
-              <a:rPr sz="1300" b="0">
-                <a:solidFill>
-                  <a:srgbClr val="FFFFFF"/>
-                </a:solidFill>
-                <a:latin typeface="Consolas"/>
-              </a:rPr>
-              <a:t>        (what the engineer approves)  (what EcoStruxure opens)</a:t>
-            </a:r>
-          </a:p>
-        </p:txBody>
-      </p:sp>
-      <p:sp>
-        <p:nvSpPr>
-          <p:cNvPr id="8" name="TextBox 7"/>
+              <a:t>DEMO · 3  ·  THE PAIN POINT, SOLVED</a:t>
+            </a:r>
+          </a:p>
+        </p:txBody>
+      </p:sp>
+      <p:sp>
+        <p:nvSpPr>
+          <p:cNvPr id="10" name="TextBox 9"/>
           <p:cNvSpPr txBox="1"/>
           <p:nvPr/>
         </p:nvSpPr>
         <p:spPr>
           <a:xfrm>
-            <a:off x="685800" y="3840480"/>
-            <a:ext cx="10789920" cy="2286000"/>
+            <a:off x="685800" y="2395728"/>
+            <a:ext cx="2919679" cy="4206240"/>
           </a:xfrm>
           <a:prstGeom prst="rect">
             <a:avLst/>
@@ -9515,41 +11469,19 @@
               </a:spcAft>
             </a:pPr>
             <a:r>
-              <a:rPr sz="1600" b="1">
+              <a:rPr sz="1550" b="1">
                 <a:solidFill>
                   <a:srgbClr val="1A1F26"/>
                 </a:solidFill>
                 <a:latin typeface="Arial"/>
               </a:rPr>
-              <a:t>The same JSON drives the preview and the file. There is no second model of the screen to drift from the first.</a:t>
+              <a:t>The binding map, drawn from the real Sources / Targets graph inside the .eote.</a:t>
             </a:r>
           </a:p>
           <a:p>
             <a:pPr algn="l">
               <a:lnSpc>
-                <a:spcPct val="135000"/>
-              </a:lnSpc>
-              <a:spcBef>
-                <a:spcPts val="0"/>
-              </a:spcBef>
-              <a:spcAft>
-                <a:spcPts val="1300"/>
-              </a:spcAft>
-            </a:pPr>
-            <a:r>
-              <a:rPr sz="1450" b="0">
-                <a:solidFill>
-                  <a:srgbClr val="5A6673"/>
-                </a:solidFill>
-                <a:latin typeface="Arial"/>
-              </a:rPr>
-              <a:t>And it is the compiler that enforces it, not discipline: the canvas switches exhaustively over the part union, so it cannot draw a part the packager cannot write.</a:t>
-            </a:r>
-          </a:p>
-          <a:p>
-            <a:pPr algn="l">
-              <a:lnSpc>
-                <a:spcPct val="130000"/>
+                <a:spcPct val="138000"/>
               </a:lnSpc>
               <a:spcBef>
                 <a:spcPts val="0"/>
@@ -9559,13 +11491,13 @@
               </a:spcAft>
             </a:pPr>
             <a:r>
-              <a:rPr sz="1900" b="1">
-                <a:solidFill>
-                  <a:srgbClr val="3DCD58"/>
+              <a:rPr sz="1300" b="0">
+                <a:solidFill>
+                  <a:srgbClr val="5A6673"/>
                 </a:solidFill>
                 <a:latin typeface="Arial"/>
               </a:rPr>
-              <a:t>What the engineer approves is what OTE opens.</a:t>
+              <a:t>Tag integration is the pain point the brief names, and today it is invisible until commissioning. Here you can check it before you export.</a:t>
             </a:r>
           </a:p>
         </p:txBody>
@@ -9672,7 +11604,7 @@
                 </a:solidFill>
                 <a:latin typeface="Arial"/>
               </a:rPr>
-              <a:t>PROOF</a:t>
+              <a:t>05 · DEMO</a:t>
             </a:r>
           </a:p>
         </p:txBody>
@@ -9717,7 +11649,7 @@
                 </a:solidFill>
                 <a:latin typeface="Arial"/>
               </a:rPr>
-              <a:t>Built, not proposed</a:t>
+              <a:t>Behaviour, before any hardware exists</a:t>
             </a:r>
           </a:p>
         </p:txBody>
@@ -9766,51 +11698,30 @@
           </a:p>
         </p:txBody>
       </p:sp>
-      <p:sp>
-        <p:nvSpPr>
-          <p:cNvPr id="6" name="TextBox 5"/>
-          <p:cNvSpPr txBox="1"/>
-          <p:nvPr/>
-        </p:nvSpPr>
-        <p:spPr>
-          <a:xfrm>
-            <a:off x="685800" y="1783080"/>
-            <a:ext cx="10789920" cy="640080"/>
-          </a:xfrm>
-          <a:prstGeom prst="rect">
-            <a:avLst/>
-          </a:prstGeom>
-          <a:noFill/>
-        </p:spPr>
-        <p:txBody>
-          <a:bodyPr wrap="square" anchor="t" lIns="0" rIns="0" tIns="0" bIns="0">
-            <a:spAutoFit/>
-          </a:bodyPr>
-          <a:lstStyle/>
-          <a:p>
-            <a:pPr algn="l">
-              <a:lnSpc>
-                <a:spcPct val="135000"/>
-              </a:lnSpc>
-              <a:spcBef>
-                <a:spcPts val="0"/>
-              </a:spcBef>
-              <a:spcAft>
-                <a:spcPts val="600"/>
-              </a:spcAft>
-            </a:pPr>
-            <a:r>
-              <a:rPr sz="1650" b="0">
-                <a:solidFill>
-                  <a:srgbClr val="1A1F26"/>
-                </a:solidFill>
-                <a:latin typeface="Arial"/>
-              </a:rPr>
-              <a:t>Two .eote files written from scratch, both open in EcoStruxure Operator Terminal Expert 4.4. Neither was ever saved by the product.</a:t>
-            </a:r>
-          </a:p>
-        </p:txBody>
-      </p:sp>
+      <p:pic>
+        <p:nvPicPr>
+          <p:cNvPr id="6" name="Picture 5" descr="06-simulation-live.png"/>
+          <p:cNvPicPr>
+            <a:picLocks noChangeAspect="1"/>
+          </p:cNvPicPr>
+          <p:nvPr/>
+        </p:nvPicPr>
+        <p:blipFill>
+          <a:blip r:embed="rId2"/>
+          <a:stretch>
+            <a:fillRect/>
+          </a:stretch>
+        </p:blipFill>
+        <p:spPr>
+          <a:xfrm>
+            <a:off x="3971239" y="1783080"/>
+            <a:ext cx="7534656" cy="4709160"/>
+          </a:xfrm>
+          <a:prstGeom prst="rect">
+            <a:avLst/>
+          </a:prstGeom>
+        </p:spPr>
+      </p:pic>
       <p:sp>
         <p:nvSpPr>
           <p:cNvPr id="7" name="Rectangle 6"/>
@@ -9819,15 +11730,13 @@
         </p:nvSpPr>
         <p:spPr>
           <a:xfrm>
-            <a:off x="685800" y="2651760"/>
-            <a:ext cx="1997049" cy="1417320"/>
-          </a:xfrm>
-          <a:prstGeom prst="rect">
-            <a:avLst/>
-          </a:prstGeom>
-          <a:solidFill>
-            <a:srgbClr val="F4F6F8"/>
-          </a:solidFill>
+            <a:off x="3971239" y="1783080"/>
+            <a:ext cx="7534656" cy="4709160"/>
+          </a:xfrm>
+          <a:prstGeom prst="rect">
+            <a:avLst/>
+          </a:prstGeom>
+          <a:noFill/>
           <a:ln w="12700">
             <a:solidFill>
               <a:srgbClr val="D8DEE5"/>
@@ -9859,14 +11768,58 @@
       </p:sp>
       <p:sp>
         <p:nvSpPr>
-          <p:cNvPr id="8" name="TextBox 7"/>
+          <p:cNvPr id="8" name="Rectangle 7"/>
+          <p:cNvSpPr/>
+          <p:nvPr/>
+        </p:nvSpPr>
+        <p:spPr>
+          <a:xfrm>
+            <a:off x="685800" y="1828800"/>
+            <a:ext cx="2919679" cy="384048"/>
+          </a:xfrm>
+          <a:prstGeom prst="rect">
+            <a:avLst/>
+          </a:prstGeom>
+          <a:solidFill>
+            <a:srgbClr val="3DCD58"/>
+          </a:solidFill>
+          <a:ln>
+            <a:noFill/>
+          </a:ln>
+          <a:effectLst/>
+        </p:spPr>
+        <p:style>
+          <a:lnRef idx="1">
+            <a:schemeClr val="accent1"/>
+          </a:lnRef>
+          <a:fillRef idx="3">
+            <a:schemeClr val="accent1"/>
+          </a:fillRef>
+          <a:effectRef idx="2">
+            <a:schemeClr val="accent1"/>
+          </a:effectRef>
+          <a:fontRef idx="minor">
+            <a:schemeClr val="lt1"/>
+          </a:fontRef>
+        </p:style>
+        <p:txBody>
+          <a:bodyPr rtlCol="0" anchor="ctr"/>
+          <a:lstStyle/>
+          <a:p>
+            <a:pPr algn="ctr"/>
+          </a:p>
+        </p:txBody>
+      </p:sp>
+      <p:sp>
+        <p:nvSpPr>
+          <p:cNvPr id="9" name="TextBox 8"/>
           <p:cNvSpPr txBox="1"/>
           <p:nvPr/>
         </p:nvSpPr>
         <p:spPr>
           <a:xfrm>
-            <a:off x="685800" y="2852928"/>
-            <a:ext cx="1997049" cy="640080"/>
+            <a:off x="777240" y="1911096"/>
+            <a:ext cx="2736799" cy="274320"/>
           </a:xfrm>
           <a:prstGeom prst="rect">
             <a:avLst/>
@@ -9879,7 +11832,7 @@
           </a:bodyPr>
           <a:lstStyle/>
           <a:p>
-            <a:pPr algn="ctr">
+            <a:pPr algn="l">
               <a:lnSpc>
                 <a:spcPct val="125000"/>
               </a:lnSpc>
@@ -9891,27 +11844,27 @@
               </a:spcAft>
             </a:pPr>
             <a:r>
-              <a:rPr sz="3400" b="1">
-                <a:solidFill>
-                  <a:srgbClr val="3DCD58"/>
+              <a:rPr sz="1200" b="1">
+                <a:solidFill>
+                  <a:srgbClr val="FFFFFF"/>
                 </a:solidFill>
                 <a:latin typeface="Arial"/>
               </a:rPr>
-              <a:t>19</a:t>
-            </a:r>
-          </a:p>
-        </p:txBody>
-      </p:sp>
-      <p:sp>
-        <p:nvSpPr>
-          <p:cNvPr id="9" name="TextBox 8"/>
+              <a:t>DEMO · 4  ·  VALIDATION WITHOUT HARDWARE</a:t>
+            </a:r>
+          </a:p>
+        </p:txBody>
+      </p:sp>
+      <p:sp>
+        <p:nvSpPr>
+          <p:cNvPr id="10" name="TextBox 9"/>
           <p:cNvSpPr txBox="1"/>
           <p:nvPr/>
         </p:nvSpPr>
         <p:spPr>
           <a:xfrm>
-            <a:off x="795528" y="3520440"/>
-            <a:ext cx="1777593" cy="457200"/>
+            <a:off x="685800" y="2395728"/>
+            <a:ext cx="2919679" cy="4206240"/>
           </a:xfrm>
           <a:prstGeom prst="rect">
             <a:avLst/>
@@ -9924,9 +11877,31 @@
           </a:bodyPr>
           <a:lstStyle/>
           <a:p>
-            <a:pPr algn="ctr">
+            <a:pPr algn="l">
               <a:lnSpc>
-                <a:spcPct val="115000"/>
+                <a:spcPct val="132000"/>
+              </a:lnSpc>
+              <a:spcBef>
+                <a:spcPts val="0"/>
+              </a:spcBef>
+              <a:spcAft>
+                <a:spcPts val="1300"/>
+              </a:spcAft>
+            </a:pPr>
+            <a:r>
+              <a:rPr sz="1550" b="1">
+                <a:solidFill>
+                  <a:srgbClr val="1A1F26"/>
+                </a:solidFill>
+                <a:latin typeface="Arial"/>
+              </a:rPr>
+              <a:t>Press Simulate and a process model drives the screen: lamps change state, numbers move, alarms raise.</a:t>
+            </a:r>
+          </a:p>
+          <a:p>
+            <a:pPr algn="l">
+              <a:lnSpc>
+                <a:spcPct val="138000"/>
               </a:lnSpc>
               <a:spcBef>
                 <a:spcPts val="0"/>
@@ -9936,1147 +11911,13 @@
               </a:spcAft>
             </a:pPr>
             <a:r>
-              <a:rPr sz="1150" b="0">
+              <a:rPr sz="1300" b="0">
                 <a:solidFill>
                   <a:srgbClr val="5A6673"/>
                 </a:solidFill>
                 <a:latin typeface="Arial"/>
               </a:rPr>
-              <a:t>parts placed</a:t>
-            </a:r>
-          </a:p>
-        </p:txBody>
-      </p:sp>
-      <p:sp>
-        <p:nvSpPr>
-          <p:cNvPr id="10" name="Rectangle 9"/>
-          <p:cNvSpPr/>
-          <p:nvPr/>
-        </p:nvSpPr>
-        <p:spPr>
-          <a:xfrm>
-            <a:off x="2884017" y="2651760"/>
-            <a:ext cx="1997049" cy="1417320"/>
-          </a:xfrm>
-          <a:prstGeom prst="rect">
-            <a:avLst/>
-          </a:prstGeom>
-          <a:solidFill>
-            <a:srgbClr val="F4F6F8"/>
-          </a:solidFill>
-          <a:ln w="12700">
-            <a:solidFill>
-              <a:srgbClr val="D8DEE5"/>
-            </a:solidFill>
-          </a:ln>
-          <a:effectLst/>
-        </p:spPr>
-        <p:style>
-          <a:lnRef idx="1">
-            <a:schemeClr val="accent1"/>
-          </a:lnRef>
-          <a:fillRef idx="3">
-            <a:schemeClr val="accent1"/>
-          </a:fillRef>
-          <a:effectRef idx="2">
-            <a:schemeClr val="accent1"/>
-          </a:effectRef>
-          <a:fontRef idx="minor">
-            <a:schemeClr val="lt1"/>
-          </a:fontRef>
-        </p:style>
-        <p:txBody>
-          <a:bodyPr rtlCol="0" anchor="ctr"/>
-          <a:lstStyle/>
-          <a:p>
-            <a:pPr algn="ctr"/>
-          </a:p>
-        </p:txBody>
-      </p:sp>
-      <p:sp>
-        <p:nvSpPr>
-          <p:cNvPr id="11" name="TextBox 10"/>
-          <p:cNvSpPr txBox="1"/>
-          <p:nvPr/>
-        </p:nvSpPr>
-        <p:spPr>
-          <a:xfrm>
-            <a:off x="2884017" y="2852928"/>
-            <a:ext cx="1997049" cy="640080"/>
-          </a:xfrm>
-          <a:prstGeom prst="rect">
-            <a:avLst/>
-          </a:prstGeom>
-          <a:noFill/>
-        </p:spPr>
-        <p:txBody>
-          <a:bodyPr wrap="square" anchor="t" lIns="0" rIns="0" tIns="0" bIns="0">
-            <a:spAutoFit/>
-          </a:bodyPr>
-          <a:lstStyle/>
-          <a:p>
-            <a:pPr algn="ctr">
-              <a:lnSpc>
-                <a:spcPct val="125000"/>
-              </a:lnSpc>
-              <a:spcBef>
-                <a:spcPts val="0"/>
-              </a:spcBef>
-              <a:spcAft>
-                <a:spcPts val="600"/>
-              </a:spcAft>
-            </a:pPr>
-            <a:r>
-              <a:rPr sz="3400" b="1">
-                <a:solidFill>
-                  <a:srgbClr val="3DCD58"/>
-                </a:solidFill>
-                <a:latin typeface="Arial"/>
-              </a:rPr>
-              <a:t>7</a:t>
-            </a:r>
-          </a:p>
-        </p:txBody>
-      </p:sp>
-      <p:sp>
-        <p:nvSpPr>
-          <p:cNvPr id="12" name="TextBox 11"/>
-          <p:cNvSpPr txBox="1"/>
-          <p:nvPr/>
-        </p:nvSpPr>
-        <p:spPr>
-          <a:xfrm>
-            <a:off x="2993745" y="3520440"/>
-            <a:ext cx="1777593" cy="457200"/>
-          </a:xfrm>
-          <a:prstGeom prst="rect">
-            <a:avLst/>
-          </a:prstGeom>
-          <a:noFill/>
-        </p:spPr>
-        <p:txBody>
-          <a:bodyPr wrap="square" anchor="t" lIns="0" rIns="0" tIns="0" bIns="0">
-            <a:spAutoFit/>
-          </a:bodyPr>
-          <a:lstStyle/>
-          <a:p>
-            <a:pPr algn="ctr">
-              <a:lnSpc>
-                <a:spcPct val="115000"/>
-              </a:lnSpc>
-              <a:spcBef>
-                <a:spcPts val="0"/>
-              </a:spcBef>
-              <a:spcAft>
-                <a:spcPts val="600"/>
-              </a:spcAft>
-            </a:pPr>
-            <a:r>
-              <a:rPr sz="1150" b="0">
-                <a:solidFill>
-                  <a:srgbClr val="5A6673"/>
-                </a:solidFill>
-                <a:latin typeface="Arial"/>
-              </a:rPr>
-              <a:t>typed tags</a:t>
-            </a:r>
-          </a:p>
-        </p:txBody>
-      </p:sp>
-      <p:sp>
-        <p:nvSpPr>
-          <p:cNvPr id="13" name="Rectangle 12"/>
-          <p:cNvSpPr/>
-          <p:nvPr/>
-        </p:nvSpPr>
-        <p:spPr>
-          <a:xfrm>
-            <a:off x="5082235" y="2651760"/>
-            <a:ext cx="1997049" cy="1417320"/>
-          </a:xfrm>
-          <a:prstGeom prst="rect">
-            <a:avLst/>
-          </a:prstGeom>
-          <a:solidFill>
-            <a:srgbClr val="F4F6F8"/>
-          </a:solidFill>
-          <a:ln w="12700">
-            <a:solidFill>
-              <a:srgbClr val="D8DEE5"/>
-            </a:solidFill>
-          </a:ln>
-          <a:effectLst/>
-        </p:spPr>
-        <p:style>
-          <a:lnRef idx="1">
-            <a:schemeClr val="accent1"/>
-          </a:lnRef>
-          <a:fillRef idx="3">
-            <a:schemeClr val="accent1"/>
-          </a:fillRef>
-          <a:effectRef idx="2">
-            <a:schemeClr val="accent1"/>
-          </a:effectRef>
-          <a:fontRef idx="minor">
-            <a:schemeClr val="lt1"/>
-          </a:fontRef>
-        </p:style>
-        <p:txBody>
-          <a:bodyPr rtlCol="0" anchor="ctr"/>
-          <a:lstStyle/>
-          <a:p>
-            <a:pPr algn="ctr"/>
-          </a:p>
-        </p:txBody>
-      </p:sp>
-      <p:sp>
-        <p:nvSpPr>
-          <p:cNvPr id="14" name="TextBox 13"/>
-          <p:cNvSpPr txBox="1"/>
-          <p:nvPr/>
-        </p:nvSpPr>
-        <p:spPr>
-          <a:xfrm>
-            <a:off x="5082235" y="2852928"/>
-            <a:ext cx="1997049" cy="640080"/>
-          </a:xfrm>
-          <a:prstGeom prst="rect">
-            <a:avLst/>
-          </a:prstGeom>
-          <a:noFill/>
-        </p:spPr>
-        <p:txBody>
-          <a:bodyPr wrap="square" anchor="t" lIns="0" rIns="0" tIns="0" bIns="0">
-            <a:spAutoFit/>
-          </a:bodyPr>
-          <a:lstStyle/>
-          <a:p>
-            <a:pPr algn="ctr">
-              <a:lnSpc>
-                <a:spcPct val="125000"/>
-              </a:lnSpc>
-              <a:spcBef>
-                <a:spcPts val="0"/>
-              </a:spcBef>
-              <a:spcAft>
-                <a:spcPts val="600"/>
-              </a:spcAft>
-            </a:pPr>
-            <a:r>
-              <a:rPr sz="3400" b="1">
-                <a:solidFill>
-                  <a:srgbClr val="3DCD58"/>
-                </a:solidFill>
-                <a:latin typeface="Arial"/>
-              </a:rPr>
-              <a:t>5</a:t>
-            </a:r>
-          </a:p>
-        </p:txBody>
-      </p:sp>
-      <p:sp>
-        <p:nvSpPr>
-          <p:cNvPr id="15" name="TextBox 14"/>
-          <p:cNvSpPr txBox="1"/>
-          <p:nvPr/>
-        </p:nvSpPr>
-        <p:spPr>
-          <a:xfrm>
-            <a:off x="5191963" y="3520440"/>
-            <a:ext cx="1777593" cy="457200"/>
-          </a:xfrm>
-          <a:prstGeom prst="rect">
-            <a:avLst/>
-          </a:prstGeom>
-          <a:noFill/>
-        </p:spPr>
-        <p:txBody>
-          <a:bodyPr wrap="square" anchor="t" lIns="0" rIns="0" tIns="0" bIns="0">
-            <a:spAutoFit/>
-          </a:bodyPr>
-          <a:lstStyle/>
-          <a:p>
-            <a:pPr algn="ctr">
-              <a:lnSpc>
-                <a:spcPct val="115000"/>
-              </a:lnSpc>
-              <a:spcBef>
-                <a:spcPts val="0"/>
-              </a:spcBef>
-              <a:spcAft>
-                <a:spcPts val="600"/>
-              </a:spcAft>
-            </a:pPr>
-            <a:r>
-              <a:rPr sz="1150" b="0">
-                <a:solidFill>
-                  <a:srgbClr val="5A6673"/>
-                </a:solidFill>
-                <a:latin typeface="Arial"/>
-              </a:rPr>
-              <a:t>alarms</a:t>
-            </a:r>
-          </a:p>
-        </p:txBody>
-      </p:sp>
-      <p:sp>
-        <p:nvSpPr>
-          <p:cNvPr id="16" name="Rectangle 15"/>
-          <p:cNvSpPr/>
-          <p:nvPr/>
-        </p:nvSpPr>
-        <p:spPr>
-          <a:xfrm>
-            <a:off x="7280452" y="2651760"/>
-            <a:ext cx="1997049" cy="1417320"/>
-          </a:xfrm>
-          <a:prstGeom prst="rect">
-            <a:avLst/>
-          </a:prstGeom>
-          <a:solidFill>
-            <a:srgbClr val="F4F6F8"/>
-          </a:solidFill>
-          <a:ln w="12700">
-            <a:solidFill>
-              <a:srgbClr val="D8DEE5"/>
-            </a:solidFill>
-          </a:ln>
-          <a:effectLst/>
-        </p:spPr>
-        <p:style>
-          <a:lnRef idx="1">
-            <a:schemeClr val="accent1"/>
-          </a:lnRef>
-          <a:fillRef idx="3">
-            <a:schemeClr val="accent1"/>
-          </a:fillRef>
-          <a:effectRef idx="2">
-            <a:schemeClr val="accent1"/>
-          </a:effectRef>
-          <a:fontRef idx="minor">
-            <a:schemeClr val="lt1"/>
-          </a:fontRef>
-        </p:style>
-        <p:txBody>
-          <a:bodyPr rtlCol="0" anchor="ctr"/>
-          <a:lstStyle/>
-          <a:p>
-            <a:pPr algn="ctr"/>
-          </a:p>
-        </p:txBody>
-      </p:sp>
-      <p:sp>
-        <p:nvSpPr>
-          <p:cNvPr id="17" name="TextBox 16"/>
-          <p:cNvSpPr txBox="1"/>
-          <p:nvPr/>
-        </p:nvSpPr>
-        <p:spPr>
-          <a:xfrm>
-            <a:off x="7280452" y="2852928"/>
-            <a:ext cx="1997049" cy="640080"/>
-          </a:xfrm>
-          <a:prstGeom prst="rect">
-            <a:avLst/>
-          </a:prstGeom>
-          <a:noFill/>
-        </p:spPr>
-        <p:txBody>
-          <a:bodyPr wrap="square" anchor="t" lIns="0" rIns="0" tIns="0" bIns="0">
-            <a:spAutoFit/>
-          </a:bodyPr>
-          <a:lstStyle/>
-          <a:p>
-            <a:pPr algn="ctr">
-              <a:lnSpc>
-                <a:spcPct val="125000"/>
-              </a:lnSpc>
-              <a:spcBef>
-                <a:spcPts val="0"/>
-              </a:spcBef>
-              <a:spcAft>
-                <a:spcPts val="600"/>
-              </a:spcAft>
-            </a:pPr>
-            <a:r>
-              <a:rPr sz="3400" b="1">
-                <a:solidFill>
-                  <a:srgbClr val="3DCD58"/>
-                </a:solidFill>
-                <a:latin typeface="Arial"/>
-              </a:rPr>
-              <a:t>11</a:t>
-            </a:r>
-          </a:p>
-        </p:txBody>
-      </p:sp>
-      <p:sp>
-        <p:nvSpPr>
-          <p:cNvPr id="18" name="TextBox 17"/>
-          <p:cNvSpPr txBox="1"/>
-          <p:nvPr/>
-        </p:nvSpPr>
-        <p:spPr>
-          <a:xfrm>
-            <a:off x="7390180" y="3520440"/>
-            <a:ext cx="1777593" cy="457200"/>
-          </a:xfrm>
-          <a:prstGeom prst="rect">
-            <a:avLst/>
-          </a:prstGeom>
-          <a:noFill/>
-        </p:spPr>
-        <p:txBody>
-          <a:bodyPr wrap="square" anchor="t" lIns="0" rIns="0" tIns="0" bIns="0">
-            <a:spAutoFit/>
-          </a:bodyPr>
-          <a:lstStyle/>
-          <a:p>
-            <a:pPr algn="ctr">
-              <a:lnSpc>
-                <a:spcPct val="115000"/>
-              </a:lnSpc>
-              <a:spcBef>
-                <a:spcPts val="0"/>
-              </a:spcBef>
-              <a:spcAft>
-                <a:spcPts val="600"/>
-              </a:spcAft>
-            </a:pPr>
-            <a:r>
-              <a:rPr sz="1150" b="0">
-                <a:solidFill>
-                  <a:srgbClr val="5A6673"/>
-                </a:solidFill>
-                <a:latin typeface="Arial"/>
-              </a:rPr>
-              <a:t>bindings</a:t>
-            </a:r>
-          </a:p>
-        </p:txBody>
-      </p:sp>
-      <p:sp>
-        <p:nvSpPr>
-          <p:cNvPr id="19" name="Rectangle 18"/>
-          <p:cNvSpPr/>
-          <p:nvPr/>
-        </p:nvSpPr>
-        <p:spPr>
-          <a:xfrm>
-            <a:off x="9478670" y="2651760"/>
-            <a:ext cx="1997049" cy="1417320"/>
-          </a:xfrm>
-          <a:prstGeom prst="rect">
-            <a:avLst/>
-          </a:prstGeom>
-          <a:solidFill>
-            <a:srgbClr val="F4F6F8"/>
-          </a:solidFill>
-          <a:ln w="12700">
-            <a:solidFill>
-              <a:srgbClr val="D8DEE5"/>
-            </a:solidFill>
-          </a:ln>
-          <a:effectLst/>
-        </p:spPr>
-        <p:style>
-          <a:lnRef idx="1">
-            <a:schemeClr val="accent1"/>
-          </a:lnRef>
-          <a:fillRef idx="3">
-            <a:schemeClr val="accent1"/>
-          </a:fillRef>
-          <a:effectRef idx="2">
-            <a:schemeClr val="accent1"/>
-          </a:effectRef>
-          <a:fontRef idx="minor">
-            <a:schemeClr val="lt1"/>
-          </a:fontRef>
-        </p:style>
-        <p:txBody>
-          <a:bodyPr rtlCol="0" anchor="ctr"/>
-          <a:lstStyle/>
-          <a:p>
-            <a:pPr algn="ctr"/>
-          </a:p>
-        </p:txBody>
-      </p:sp>
-      <p:sp>
-        <p:nvSpPr>
-          <p:cNvPr id="20" name="TextBox 19"/>
-          <p:cNvSpPr txBox="1"/>
-          <p:nvPr/>
-        </p:nvSpPr>
-        <p:spPr>
-          <a:xfrm>
-            <a:off x="9478670" y="2852928"/>
-            <a:ext cx="1997049" cy="640080"/>
-          </a:xfrm>
-          <a:prstGeom prst="rect">
-            <a:avLst/>
-          </a:prstGeom>
-          <a:noFill/>
-        </p:spPr>
-        <p:txBody>
-          <a:bodyPr wrap="square" anchor="t" lIns="0" rIns="0" tIns="0" bIns="0">
-            <a:spAutoFit/>
-          </a:bodyPr>
-          <a:lstStyle/>
-          <a:p>
-            <a:pPr algn="ctr">
-              <a:lnSpc>
-                <a:spcPct val="125000"/>
-              </a:lnSpc>
-              <a:spcBef>
-                <a:spcPts val="0"/>
-              </a:spcBef>
-              <a:spcAft>
-                <a:spcPts val="600"/>
-              </a:spcAft>
-            </a:pPr>
-            <a:r>
-              <a:rPr sz="3400" b="1">
-                <a:solidFill>
-                  <a:srgbClr val="3DCD58"/>
-                </a:solidFill>
-                <a:latin typeface="Arial"/>
-              </a:rPr>
-              <a:t>0</a:t>
-            </a:r>
-          </a:p>
-        </p:txBody>
-      </p:sp>
-      <p:sp>
-        <p:nvSpPr>
-          <p:cNvPr id="21" name="TextBox 20"/>
-          <p:cNvSpPr txBox="1"/>
-          <p:nvPr/>
-        </p:nvSpPr>
-        <p:spPr>
-          <a:xfrm>
-            <a:off x="9588398" y="3520440"/>
-            <a:ext cx="1777593" cy="457200"/>
-          </a:xfrm>
-          <a:prstGeom prst="rect">
-            <a:avLst/>
-          </a:prstGeom>
-          <a:noFill/>
-        </p:spPr>
-        <p:txBody>
-          <a:bodyPr wrap="square" anchor="t" lIns="0" rIns="0" tIns="0" bIns="0">
-            <a:spAutoFit/>
-          </a:bodyPr>
-          <a:lstStyle/>
-          <a:p>
-            <a:pPr algn="ctr">
-              <a:lnSpc>
-                <a:spcPct val="115000"/>
-              </a:lnSpc>
-              <a:spcBef>
-                <a:spcPts val="0"/>
-              </a:spcBef>
-              <a:spcAft>
-                <a:spcPts val="600"/>
-              </a:spcAft>
-            </a:pPr>
-            <a:r>
-              <a:rPr sz="1150" b="0">
-                <a:solidFill>
-                  <a:srgbClr val="5A6673"/>
-                </a:solidFill>
-                <a:latin typeface="Arial"/>
-              </a:rPr>
-              <a:t>placed by hand</a:t>
-            </a:r>
-          </a:p>
-        </p:txBody>
-      </p:sp>
-      <p:sp>
-        <p:nvSpPr>
-          <p:cNvPr id="22" name="Rectangle 21"/>
-          <p:cNvSpPr/>
-          <p:nvPr/>
-        </p:nvSpPr>
-        <p:spPr>
-          <a:xfrm>
-            <a:off x="685800" y="4343400"/>
-            <a:ext cx="2546604" cy="1417320"/>
-          </a:xfrm>
-          <a:prstGeom prst="rect">
-            <a:avLst/>
-          </a:prstGeom>
-          <a:solidFill>
-            <a:srgbClr val="F4F6F8"/>
-          </a:solidFill>
-          <a:ln w="12700">
-            <a:solidFill>
-              <a:srgbClr val="D8DEE5"/>
-            </a:solidFill>
-          </a:ln>
-          <a:effectLst/>
-        </p:spPr>
-        <p:style>
-          <a:lnRef idx="1">
-            <a:schemeClr val="accent1"/>
-          </a:lnRef>
-          <a:fillRef idx="3">
-            <a:schemeClr val="accent1"/>
-          </a:fillRef>
-          <a:effectRef idx="2">
-            <a:schemeClr val="accent1"/>
-          </a:effectRef>
-          <a:fontRef idx="minor">
-            <a:schemeClr val="lt1"/>
-          </a:fontRef>
-        </p:style>
-        <p:txBody>
-          <a:bodyPr rtlCol="0" anchor="ctr"/>
-          <a:lstStyle/>
-          <a:p>
-            <a:pPr algn="ctr"/>
-          </a:p>
-        </p:txBody>
-      </p:sp>
-      <p:sp>
-        <p:nvSpPr>
-          <p:cNvPr id="23" name="TextBox 22"/>
-          <p:cNvSpPr txBox="1"/>
-          <p:nvPr/>
-        </p:nvSpPr>
-        <p:spPr>
-          <a:xfrm>
-            <a:off x="685800" y="4544568"/>
-            <a:ext cx="2546604" cy="640080"/>
-          </a:xfrm>
-          <a:prstGeom prst="rect">
-            <a:avLst/>
-          </a:prstGeom>
-          <a:noFill/>
-        </p:spPr>
-        <p:txBody>
-          <a:bodyPr wrap="square" anchor="t" lIns="0" rIns="0" tIns="0" bIns="0">
-            <a:spAutoFit/>
-          </a:bodyPr>
-          <a:lstStyle/>
-          <a:p>
-            <a:pPr algn="ctr">
-              <a:lnSpc>
-                <a:spcPct val="125000"/>
-              </a:lnSpc>
-              <a:spcBef>
-                <a:spcPts val="0"/>
-              </a:spcBef>
-              <a:spcAft>
-                <a:spcPts val="600"/>
-              </a:spcAft>
-            </a:pPr>
-            <a:r>
-              <a:rPr sz="3400" b="1">
-                <a:solidFill>
-                  <a:srgbClr val="3DCD58"/>
-                </a:solidFill>
-                <a:latin typeface="Arial"/>
-              </a:rPr>
-              <a:t>467</a:t>
-            </a:r>
-          </a:p>
-        </p:txBody>
-      </p:sp>
-      <p:sp>
-        <p:nvSpPr>
-          <p:cNvPr id="24" name="TextBox 23"/>
-          <p:cNvSpPr txBox="1"/>
-          <p:nvPr/>
-        </p:nvSpPr>
-        <p:spPr>
-          <a:xfrm>
-            <a:off x="795528" y="5212080"/>
-            <a:ext cx="2327148" cy="457200"/>
-          </a:xfrm>
-          <a:prstGeom prst="rect">
-            <a:avLst/>
-          </a:prstGeom>
-          <a:noFill/>
-        </p:spPr>
-        <p:txBody>
-          <a:bodyPr wrap="square" anchor="t" lIns="0" rIns="0" tIns="0" bIns="0">
-            <a:spAutoFit/>
-          </a:bodyPr>
-          <a:lstStyle/>
-          <a:p>
-            <a:pPr algn="ctr">
-              <a:lnSpc>
-                <a:spcPct val="115000"/>
-              </a:lnSpc>
-              <a:spcBef>
-                <a:spcPts val="0"/>
-              </a:spcBef>
-              <a:spcAft>
-                <a:spcPts val="600"/>
-              </a:spcAft>
-            </a:pPr>
-            <a:r>
-              <a:rPr sz="1150" b="0">
-                <a:solidFill>
-                  <a:srgbClr val="5A6673"/>
-                </a:solidFill>
-                <a:latin typeface="Arial"/>
-              </a:rPr>
-              <a:t>tests</a:t>
-            </a:r>
-          </a:p>
-        </p:txBody>
-      </p:sp>
-      <p:sp>
-        <p:nvSpPr>
-          <p:cNvPr id="25" name="Rectangle 24"/>
-          <p:cNvSpPr/>
-          <p:nvPr/>
-        </p:nvSpPr>
-        <p:spPr>
-          <a:xfrm>
-            <a:off x="3433572" y="4343400"/>
-            <a:ext cx="2546604" cy="1417320"/>
-          </a:xfrm>
-          <a:prstGeom prst="rect">
-            <a:avLst/>
-          </a:prstGeom>
-          <a:solidFill>
-            <a:srgbClr val="F4F6F8"/>
-          </a:solidFill>
-          <a:ln w="12700">
-            <a:solidFill>
-              <a:srgbClr val="D8DEE5"/>
-            </a:solidFill>
-          </a:ln>
-          <a:effectLst/>
-        </p:spPr>
-        <p:style>
-          <a:lnRef idx="1">
-            <a:schemeClr val="accent1"/>
-          </a:lnRef>
-          <a:fillRef idx="3">
-            <a:schemeClr val="accent1"/>
-          </a:fillRef>
-          <a:effectRef idx="2">
-            <a:schemeClr val="accent1"/>
-          </a:effectRef>
-          <a:fontRef idx="minor">
-            <a:schemeClr val="lt1"/>
-          </a:fontRef>
-        </p:style>
-        <p:txBody>
-          <a:bodyPr rtlCol="0" anchor="ctr"/>
-          <a:lstStyle/>
-          <a:p>
-            <a:pPr algn="ctr"/>
-          </a:p>
-        </p:txBody>
-      </p:sp>
-      <p:sp>
-        <p:nvSpPr>
-          <p:cNvPr id="26" name="TextBox 25"/>
-          <p:cNvSpPr txBox="1"/>
-          <p:nvPr/>
-        </p:nvSpPr>
-        <p:spPr>
-          <a:xfrm>
-            <a:off x="3433572" y="4544568"/>
-            <a:ext cx="2546604" cy="640080"/>
-          </a:xfrm>
-          <a:prstGeom prst="rect">
-            <a:avLst/>
-          </a:prstGeom>
-          <a:noFill/>
-        </p:spPr>
-        <p:txBody>
-          <a:bodyPr wrap="square" anchor="t" lIns="0" rIns="0" tIns="0" bIns="0">
-            <a:spAutoFit/>
-          </a:bodyPr>
-          <a:lstStyle/>
-          <a:p>
-            <a:pPr algn="ctr">
-              <a:lnSpc>
-                <a:spcPct val="125000"/>
-              </a:lnSpc>
-              <a:spcBef>
-                <a:spcPts val="0"/>
-              </a:spcBef>
-              <a:spcAft>
-                <a:spcPts val="600"/>
-              </a:spcAft>
-            </a:pPr>
-            <a:r>
-              <a:rPr sz="3400" b="1">
-                <a:solidFill>
-                  <a:srgbClr val="3DCD58"/>
-                </a:solidFill>
-                <a:latin typeface="Arial"/>
-              </a:rPr>
-              <a:t>474</a:t>
-            </a:r>
-          </a:p>
-        </p:txBody>
-      </p:sp>
-      <p:sp>
-        <p:nvSpPr>
-          <p:cNvPr id="27" name="TextBox 26"/>
-          <p:cNvSpPr txBox="1"/>
-          <p:nvPr/>
-        </p:nvSpPr>
-        <p:spPr>
-          <a:xfrm>
-            <a:off x="3543300" y="5212080"/>
-            <a:ext cx="2327148" cy="457200"/>
-          </a:xfrm>
-          <a:prstGeom prst="rect">
-            <a:avLst/>
-          </a:prstGeom>
-          <a:noFill/>
-        </p:spPr>
-        <p:txBody>
-          <a:bodyPr wrap="square" anchor="t" lIns="0" rIns="0" tIns="0" bIns="0">
-            <a:spAutoFit/>
-          </a:bodyPr>
-          <a:lstStyle/>
-          <a:p>
-            <a:pPr algn="ctr">
-              <a:lnSpc>
-                <a:spcPct val="115000"/>
-              </a:lnSpc>
-              <a:spcBef>
-                <a:spcPts val="0"/>
-              </a:spcBef>
-              <a:spcAft>
-                <a:spcPts val="600"/>
-              </a:spcAft>
-            </a:pPr>
-            <a:r>
-              <a:rPr sz="1150" b="0">
-                <a:solidFill>
-                  <a:srgbClr val="5A6673"/>
-                </a:solidFill>
-                <a:latin typeface="Arial"/>
-              </a:rPr>
-              <a:t>shipped symbols indexed</a:t>
-            </a:r>
-          </a:p>
-        </p:txBody>
-      </p:sp>
-      <p:sp>
-        <p:nvSpPr>
-          <p:cNvPr id="28" name="Rectangle 27"/>
-          <p:cNvSpPr/>
-          <p:nvPr/>
-        </p:nvSpPr>
-        <p:spPr>
-          <a:xfrm>
-            <a:off x="6181344" y="4343400"/>
-            <a:ext cx="2546604" cy="1417320"/>
-          </a:xfrm>
-          <a:prstGeom prst="rect">
-            <a:avLst/>
-          </a:prstGeom>
-          <a:solidFill>
-            <a:srgbClr val="F4F6F8"/>
-          </a:solidFill>
-          <a:ln w="12700">
-            <a:solidFill>
-              <a:srgbClr val="D8DEE5"/>
-            </a:solidFill>
-          </a:ln>
-          <a:effectLst/>
-        </p:spPr>
-        <p:style>
-          <a:lnRef idx="1">
-            <a:schemeClr val="accent1"/>
-          </a:lnRef>
-          <a:fillRef idx="3">
-            <a:schemeClr val="accent1"/>
-          </a:fillRef>
-          <a:effectRef idx="2">
-            <a:schemeClr val="accent1"/>
-          </a:effectRef>
-          <a:fontRef idx="minor">
-            <a:schemeClr val="lt1"/>
-          </a:fontRef>
-        </p:style>
-        <p:txBody>
-          <a:bodyPr rtlCol="0" anchor="ctr"/>
-          <a:lstStyle/>
-          <a:p>
-            <a:pPr algn="ctr"/>
-          </a:p>
-        </p:txBody>
-      </p:sp>
-      <p:sp>
-        <p:nvSpPr>
-          <p:cNvPr id="29" name="TextBox 28"/>
-          <p:cNvSpPr txBox="1"/>
-          <p:nvPr/>
-        </p:nvSpPr>
-        <p:spPr>
-          <a:xfrm>
-            <a:off x="6181344" y="4544568"/>
-            <a:ext cx="2546604" cy="640080"/>
-          </a:xfrm>
-          <a:prstGeom prst="rect">
-            <a:avLst/>
-          </a:prstGeom>
-          <a:noFill/>
-        </p:spPr>
-        <p:txBody>
-          <a:bodyPr wrap="square" anchor="t" lIns="0" rIns="0" tIns="0" bIns="0">
-            <a:spAutoFit/>
-          </a:bodyPr>
-          <a:lstStyle/>
-          <a:p>
-            <a:pPr algn="ctr">
-              <a:lnSpc>
-                <a:spcPct val="125000"/>
-              </a:lnSpc>
-              <a:spcBef>
-                <a:spcPts val="0"/>
-              </a:spcBef>
-              <a:spcAft>
-                <a:spcPts val="600"/>
-              </a:spcAft>
-            </a:pPr>
-            <a:r>
-              <a:rPr sz="3400" b="1">
-                <a:solidFill>
-                  <a:srgbClr val="3DCD58"/>
-                </a:solidFill>
-                <a:latin typeface="Arial"/>
-              </a:rPr>
-              <a:t>50</a:t>
-            </a:r>
-          </a:p>
-        </p:txBody>
-      </p:sp>
-      <p:sp>
-        <p:nvSpPr>
-          <p:cNvPr id="30" name="TextBox 29"/>
-          <p:cNvSpPr txBox="1"/>
-          <p:nvPr/>
-        </p:nvSpPr>
-        <p:spPr>
-          <a:xfrm>
-            <a:off x="6291072" y="5212080"/>
-            <a:ext cx="2327148" cy="457200"/>
-          </a:xfrm>
-          <a:prstGeom prst="rect">
-            <a:avLst/>
-          </a:prstGeom>
-          <a:noFill/>
-        </p:spPr>
-        <p:txBody>
-          <a:bodyPr wrap="square" anchor="t" lIns="0" rIns="0" tIns="0" bIns="0">
-            <a:spAutoFit/>
-          </a:bodyPr>
-          <a:lstStyle/>
-          <a:p>
-            <a:pPr algn="ctr">
-              <a:lnSpc>
-                <a:spcPct val="115000"/>
-              </a:lnSpc>
-              <a:spcBef>
-                <a:spcPts val="0"/>
-              </a:spcBef>
-              <a:spcAft>
-                <a:spcPts val="600"/>
-              </a:spcAft>
-            </a:pPr>
-            <a:r>
-              <a:rPr sz="1150" b="0">
-                <a:solidFill>
-                  <a:srgbClr val="5A6673"/>
-                </a:solidFill>
-                <a:latin typeface="Arial"/>
-              </a:rPr>
-              <a:t>real part types extracted</a:t>
-            </a:r>
-          </a:p>
-        </p:txBody>
-      </p:sp>
-      <p:sp>
-        <p:nvSpPr>
-          <p:cNvPr id="31" name="Rectangle 30"/>
-          <p:cNvSpPr/>
-          <p:nvPr/>
-        </p:nvSpPr>
-        <p:spPr>
-          <a:xfrm>
-            <a:off x="8929116" y="4343400"/>
-            <a:ext cx="2546604" cy="1417320"/>
-          </a:xfrm>
-          <a:prstGeom prst="rect">
-            <a:avLst/>
-          </a:prstGeom>
-          <a:solidFill>
-            <a:srgbClr val="F4F6F8"/>
-          </a:solidFill>
-          <a:ln w="12700">
-            <a:solidFill>
-              <a:srgbClr val="D8DEE5"/>
-            </a:solidFill>
-          </a:ln>
-          <a:effectLst/>
-        </p:spPr>
-        <p:style>
-          <a:lnRef idx="1">
-            <a:schemeClr val="accent1"/>
-          </a:lnRef>
-          <a:fillRef idx="3">
-            <a:schemeClr val="accent1"/>
-          </a:fillRef>
-          <a:effectRef idx="2">
-            <a:schemeClr val="accent1"/>
-          </a:effectRef>
-          <a:fontRef idx="minor">
-            <a:schemeClr val="lt1"/>
-          </a:fontRef>
-        </p:style>
-        <p:txBody>
-          <a:bodyPr rtlCol="0" anchor="ctr"/>
-          <a:lstStyle/>
-          <a:p>
-            <a:pPr algn="ctr"/>
-          </a:p>
-        </p:txBody>
-      </p:sp>
-      <p:sp>
-        <p:nvSpPr>
-          <p:cNvPr id="32" name="TextBox 31"/>
-          <p:cNvSpPr txBox="1"/>
-          <p:nvPr/>
-        </p:nvSpPr>
-        <p:spPr>
-          <a:xfrm>
-            <a:off x="8929116" y="4544568"/>
-            <a:ext cx="2546604" cy="640080"/>
-          </a:xfrm>
-          <a:prstGeom prst="rect">
-            <a:avLst/>
-          </a:prstGeom>
-          <a:noFill/>
-        </p:spPr>
-        <p:txBody>
-          <a:bodyPr wrap="square" anchor="t" lIns="0" rIns="0" tIns="0" bIns="0">
-            <a:spAutoFit/>
-          </a:bodyPr>
-          <a:lstStyle/>
-          <a:p>
-            <a:pPr algn="ctr">
-              <a:lnSpc>
-                <a:spcPct val="125000"/>
-              </a:lnSpc>
-              <a:spcBef>
-                <a:spcPts val="0"/>
-              </a:spcBef>
-              <a:spcAft>
-                <a:spcPts val="600"/>
-              </a:spcAft>
-            </a:pPr>
-            <a:r>
-              <a:rPr sz="3400" b="1">
-                <a:solidFill>
-                  <a:srgbClr val="3DCD58"/>
-                </a:solidFill>
-                <a:latin typeface="Arial"/>
-              </a:rPr>
-              <a:t>2</a:t>
-            </a:r>
-          </a:p>
-        </p:txBody>
-      </p:sp>
-      <p:sp>
-        <p:nvSpPr>
-          <p:cNvPr id="33" name="TextBox 32"/>
-          <p:cNvSpPr txBox="1"/>
-          <p:nvPr/>
-        </p:nvSpPr>
-        <p:spPr>
-          <a:xfrm>
-            <a:off x="9038844" y="5212080"/>
-            <a:ext cx="2327148" cy="457200"/>
-          </a:xfrm>
-          <a:prstGeom prst="rect">
-            <a:avLst/>
-          </a:prstGeom>
-          <a:noFill/>
-        </p:spPr>
-        <p:txBody>
-          <a:bodyPr wrap="square" anchor="t" lIns="0" rIns="0" tIns="0" bIns="0">
-            <a:spAutoFit/>
-          </a:bodyPr>
-          <a:lstStyle/>
-          <a:p>
-            <a:pPr algn="ctr">
-              <a:lnSpc>
-                <a:spcPct val="115000"/>
-              </a:lnSpc>
-              <a:spcBef>
-                <a:spcPts val="0"/>
-              </a:spcBef>
-              <a:spcAft>
-                <a:spcPts val="600"/>
-              </a:spcAft>
-            </a:pPr>
-            <a:r>
-              <a:rPr sz="1150" b="0">
-                <a:solidFill>
-                  <a:srgbClr val="5A6673"/>
-                </a:solidFill>
-                <a:latin typeface="Arial"/>
-              </a:rPr>
-              <a:t>independent packagers
-that agree</a:t>
-            </a:r>
-          </a:p>
-        </p:txBody>
-      </p:sp>
-      <p:sp>
-        <p:nvSpPr>
-          <p:cNvPr id="34" name="TextBox 33"/>
-          <p:cNvSpPr txBox="1"/>
-          <p:nvPr/>
-        </p:nvSpPr>
-        <p:spPr>
-          <a:xfrm>
-            <a:off x="685800" y="5943600"/>
-            <a:ext cx="10789920" cy="640080"/>
-          </a:xfrm>
-          <a:prstGeom prst="rect">
-            <a:avLst/>
-          </a:prstGeom>
-          <a:noFill/>
-        </p:spPr>
-        <p:txBody>
-          <a:bodyPr wrap="square" anchor="t" lIns="0" rIns="0" tIns="0" bIns="0">
-            <a:spAutoFit/>
-          </a:bodyPr>
-          <a:lstStyle/>
-          <a:p>
-            <a:pPr algn="l">
-              <a:lnSpc>
-                <a:spcPct val="130000"/>
-              </a:lnSpc>
-              <a:spcBef>
-                <a:spcPts val="0"/>
-              </a:spcBef>
-              <a:spcAft>
-                <a:spcPts val="600"/>
-              </a:spcAft>
-            </a:pPr>
-            <a:r>
-              <a:rPr sz="1350" b="0">
-                <a:solidFill>
-                  <a:srgbClr val="5A6673"/>
-                </a:solidFill>
-                <a:latin typeface="Arial"/>
-              </a:rPr>
-              <a:t>A Python reference and a TypeScript packager, structurally diffed against each other. Two implementations agreeing is a stronger claim than either passing its own tests.</a:t>
+              <a:t>Values are driven through the project’s own alarm setpoints, so every alarm it configured actually fires. Lead and standby pumps behave differently.</a:t>
             </a:r>
           </a:p>
         </p:txBody>

--- a/docs/HMI_Copilot_5min.pptx
+++ b/docs/HMI_Copilot_5min.pptx
@@ -7859,8 +7859,8 @@
         </p:nvSpPr>
         <p:spPr>
           <a:xfrm>
-            <a:off x="1005840" y="4892040"/>
-            <a:ext cx="10058400" cy="1280160"/>
+            <a:off x="1005840" y="4754880"/>
+            <a:ext cx="10058400" cy="914400"/>
           </a:xfrm>
           <a:prstGeom prst="rect">
             <a:avLst/>
@@ -7920,13 +7920,102 @@
       </p:sp>
       <p:sp>
         <p:nvSpPr>
-          <p:cNvPr id="8" name="TextBox 7"/>
+          <p:cNvPr id="8" name="Rectangle 7"/>
+          <p:cNvSpPr/>
+          <p:nvPr/>
+        </p:nvSpPr>
+        <p:spPr>
+          <a:xfrm>
+            <a:off x="1005840" y="5623560"/>
+            <a:ext cx="7863840" cy="566928"/>
+          </a:xfrm>
+          <a:prstGeom prst="rect">
+            <a:avLst/>
+          </a:prstGeom>
+          <a:solidFill>
+            <a:srgbClr val="1A222B"/>
+          </a:solidFill>
+          <a:ln>
+            <a:noFill/>
+          </a:ln>
+          <a:effectLst/>
+        </p:spPr>
+        <p:style>
+          <a:lnRef idx="1">
+            <a:schemeClr val="accent1"/>
+          </a:lnRef>
+          <a:fillRef idx="3">
+            <a:schemeClr val="accent1"/>
+          </a:fillRef>
+          <a:effectRef idx="2">
+            <a:schemeClr val="accent1"/>
+          </a:effectRef>
+          <a:fontRef idx="minor">
+            <a:schemeClr val="lt1"/>
+          </a:fontRef>
+        </p:style>
+        <p:txBody>
+          <a:bodyPr rtlCol="0" anchor="ctr"/>
+          <a:lstStyle/>
+          <a:p>
+            <a:pPr algn="ctr"/>
+          </a:p>
+        </p:txBody>
+      </p:sp>
+      <p:sp>
+        <p:nvSpPr>
+          <p:cNvPr id="9" name="TextBox 8"/>
           <p:cNvSpPr txBox="1"/>
           <p:nvPr/>
         </p:nvSpPr>
         <p:spPr>
           <a:xfrm>
-            <a:off x="1005840" y="6172200"/>
+            <a:off x="1234440" y="5715000"/>
+            <a:ext cx="7498079" cy="411480"/>
+          </a:xfrm>
+          <a:prstGeom prst="rect">
+            <a:avLst/>
+          </a:prstGeom>
+          <a:noFill/>
+        </p:spPr>
+        <p:txBody>
+          <a:bodyPr wrap="square" anchor="t" lIns="0" rIns="0" tIns="0" bIns="0">
+            <a:spAutoFit/>
+          </a:bodyPr>
+          <a:lstStyle/>
+          <a:p>
+            <a:pPr algn="l">
+              <a:lnSpc>
+                <a:spcPct val="125000"/>
+              </a:lnSpc>
+              <a:spcBef>
+                <a:spcPts val="0"/>
+              </a:spcBef>
+              <a:spcAft>
+                <a:spcPts val="600"/>
+              </a:spcAft>
+            </a:pPr>
+            <a:r>
+              <a:rPr sz="1500" b="1">
+                <a:solidFill>
+                  <a:srgbClr val="3DCD58"/>
+                </a:solidFill>
+                <a:latin typeface="Consolas"/>
+              </a:rPr>
+              <a:t>github.com/shauryaaojha/HMI_Copilot_EcoStruxure</a:t>
+            </a:r>
+          </a:p>
+        </p:txBody>
+      </p:sp>
+      <p:sp>
+        <p:nvSpPr>
+          <p:cNvPr id="10" name="TextBox 9"/>
+          <p:cNvSpPr txBox="1"/>
+          <p:nvPr/>
+        </p:nvSpPr>
+        <p:spPr>
+          <a:xfrm>
+            <a:off x="1005840" y="6382512"/>
             <a:ext cx="10058400" cy="365760"/>
           </a:xfrm>
           <a:prstGeom prst="rect">
